--- a/tutor-time/question-the-headline/downloads/Question_the_Headline_Lesson_5.pptx
+++ b/tutor-time/question-the-headline/downloads/Question_the_Headline_Lesson_5.pptx
@@ -4672,7 +4672,7 @@
                 </a:solidFill>
                 <a:latin typeface="Karla"/>
               </a:rPr>
-              <a:t>59 healthy volunteers ate each diet for three weeks. Mensink and Katan, New England Journal of Medicine, 1990.</a:t>
+              <a:t>59 healthy volunteers ate three diets for three weeks each, and only one fat changed.</a:t>
             </a:r>
           </a:p>
         </p:txBody>
@@ -7177,7 +7177,7 @@
                 </a:solidFill>
                 <a:latin typeface="Georgia"/>
               </a:rPr>
-              <a:t>Turning liquid oil solid makes trans fat. The World Health Organization now links more than 278,000 deaths a year to trans fats made in factories. The US ruled them unsafe in 2015 and gave food companies until 2018 to remove them. Crisco changed its recipe in 2007.</a:t>
+              <a:t>Turning liquid oil solid makes trans fat. The World Health Organization now links up to 278,000 deaths a year to trans fats made in factories. The US ruled them unsafe in 2015 and gave food companies until 2018 to remove them. Crisco changed its recipe in 2007.</a:t>
             </a:r>
           </a:p>
         </p:txBody>
@@ -17230,7 +17230,7 @@
                 </a:solidFill>
                 <a:latin typeface="Karla"/>
               </a:rPr>
-              <a:t>Tested on who, for how long, and by somebody with nothing to gain?</a:t>
+              <a:t>Tested on whom, for how long, and by somebody with nothing to gain?</a:t>
             </a:r>
           </a:p>
         </p:txBody>
@@ -19536,7 +19536,7 @@
                 </a:solidFill>
                 <a:latin typeface="Georgia"/>
               </a:rPr>
-              <a:t>Procter &amp; Gamble made soap and candles. Crisco was made from cottonseed oil, which comes from the seeds left over when cotton is grown. Around 1907, with the chemist Edwin Kayser, it found a way to turn the liquid oil into a solid fat. It sold that fat as food from June 1911, and named it Crisco, from “crystallized cottonseed oil”.</a:t>
+              <a:t>Procter &amp; Gamble made soap and candles. Crisco was made from cottonseed oil, which comes from the seeds left over when cotton is grown. Around 1907, with the chemist Edwin Kayser, the company found a way to turn the oil into a solid fat. It sold that fat as food from June 1911, and named it Crisco, from “crystallized cottonseed oil”.</a:t>
             </a:r>
           </a:p>
         </p:txBody>

--- a/tutor-time/question-the-headline/downloads/Question_the_Headline_Lesson_5.pptx
+++ b/tutor-time/question-the-headline/downloads/Question_the_Headline_Lesson_5.pptx
@@ -245,7 +245,7 @@
                   <a:solidFill>
                     <a:srgbClr val="262422"/>
                   </a:solidFill>
-                  <a:latin typeface="Karla"/>
+                  <a:latin typeface="Calibri"/>
                 </a:defRPr>
               </a:pPr>
             </a:p>
@@ -287,7 +287,7 @@
           <a:p>
             <a:pPr>
               <a:defRPr sz="1100">
-                <a:latin typeface="Karla"/>
+                <a:latin typeface="Calibri"/>
               </a:defRPr>
             </a:pPr>
           </a:p>
@@ -323,7 +323,7 @@
         <a:p>
           <a:pPr>
             <a:defRPr sz="1100">
-              <a:latin typeface="Karla"/>
+              <a:latin typeface="Calibri"/>
             </a:defRPr>
           </a:pPr>
         </a:p>
@@ -340,7 +340,7 @@
           <a:solidFill>
             <a:srgbClr val="262422"/>
           </a:solidFill>
-          <a:latin typeface="Karla"/>
+          <a:latin typeface="Calibri"/>
         </a:defRPr>
       </a:pPr>
       <a:endParaRPr lang="en-US"/>
@@ -3413,7 +3413,7 @@
                 <a:solidFill>
                   <a:srgbClr val="34322F"/>
                 </a:solidFill>
-                <a:latin typeface="Karla"/>
+                <a:latin typeface="Calibri"/>
               </a:rPr>
               <a:t>TUTOR TIME  ·  QUESTION THE HEADLINE  ·  LESSON 5 OF 5</a:t>
             </a:r>
@@ -3496,11 +3496,11 @@
               </a:spcAft>
             </a:pPr>
             <a:r>
-              <a:rPr sz="3000" b="1" i="0">
+              <a:rPr sz="3000" b="0" i="0">
                 <a:solidFill>
                   <a:srgbClr val="262422"/>
                 </a:solidFill>
-                <a:latin typeface="Libre Caslon Display"/>
+                <a:latin typeface="Georgia"/>
               </a:rPr>
               <a:t>The Daily Claim</a:t>
             </a:r>
@@ -3587,7 +3587,7 @@
                 <a:solidFill>
                   <a:srgbClr val="56524B"/>
                 </a:solidFill>
-                <a:latin typeface="Karla"/>
+                <a:latin typeface="Calibri"/>
               </a:rPr>
               <a:t>CINCINNATI, 1912</a:t>
             </a:r>
@@ -3630,7 +3630,7 @@
                 <a:solidFill>
                   <a:srgbClr val="56524B"/>
                 </a:solidFill>
-                <a:latin typeface="Karla"/>
+                <a:latin typeface="Calibri"/>
               </a:rPr>
               <a:t>VOLUME ONE</a:t>
             </a:r>
@@ -3673,7 +3673,7 @@
                 <a:solidFill>
                   <a:srgbClr val="56524B"/>
                 </a:solidFill>
-                <a:latin typeface="Karla"/>
+                <a:latin typeface="Calibri"/>
               </a:rPr>
               <a:t>TUTOR TIME</a:t>
             </a:r>
@@ -3756,11 +3756,11 @@
               </a:spcAft>
             </a:pPr>
             <a:r>
-              <a:rPr sz="4200" b="1" i="0">
+              <a:rPr sz="4200" b="0" i="0">
                 <a:solidFill>
                   <a:srgbClr val="262422"/>
                 </a:solidFill>
-                <a:latin typeface="Libre Caslon Display"/>
+                <a:latin typeface="Georgia"/>
               </a:rPr>
               <a:t>It’s All Vegetable</a:t>
             </a:r>
@@ -3847,7 +3847,7 @@
                 <a:solidFill>
                   <a:srgbClr val="56524B"/>
                 </a:solidFill>
-                <a:latin typeface="Karla"/>
+                <a:latin typeface="Calibri"/>
               </a:rPr>
               <a:t>A claim that was printed as true, and four pieces of evidence to test it.</a:t>
             </a:r>
@@ -3902,7 +3902,7 @@
                 <a:solidFill>
                   <a:srgbClr val="FFFDF7"/>
                 </a:solidFill>
-                <a:latin typeface="Karla"/>
+                <a:latin typeface="Calibri"/>
               </a:rPr>
               <a:t>VOLUME ONE</a:t>
             </a:r>
@@ -3970,7 +3970,7 @@
                 <a:solidFill>
                   <a:srgbClr val="8C877D"/>
                 </a:solidFill>
-                <a:latin typeface="Karla"/>
+                <a:latin typeface="Calibri"/>
               </a:rPr>
               <a:t>The Pastoral Guide</a:t>
             </a:r>
@@ -4013,7 +4013,7 @@
                 <a:solidFill>
                   <a:srgbClr val="8C877D"/>
                 </a:solidFill>
-                <a:latin typeface="Karla"/>
+                <a:latin typeface="Calibri"/>
               </a:rPr>
               <a:t>1 / 19</a:t>
             </a:r>
@@ -4118,7 +4118,7 @@
                 <a:solidFill>
                   <a:srgbClr val="34322F"/>
                 </a:solidFill>
-                <a:latin typeface="Karla"/>
+                <a:latin typeface="Calibri"/>
               </a:rPr>
               <a:t>QUESTION THE HEADLINE  ·  LESSON 5 OF 5</a:t>
             </a:r>
@@ -4173,7 +4173,7 @@
                 <a:solidFill>
                   <a:srgbClr val="FFFDF7"/>
                 </a:solidFill>
-                <a:latin typeface="Karla"/>
+                <a:latin typeface="Calibri"/>
               </a:rPr>
               <a:t>ROUND 3 OF 4</a:t>
             </a:r>
@@ -4260,7 +4260,7 @@
                 <a:solidFill>
                   <a:srgbClr val="FFFDF7"/>
                 </a:solidFill>
-                <a:latin typeface="Karla"/>
+                <a:latin typeface="Calibri"/>
               </a:rPr>
               <a:t>EVIDENCE C</a:t>
             </a:r>
@@ -4387,11 +4387,11 @@
               </a:spcAft>
             </a:pPr>
             <a:r>
-              <a:rPr sz="1800" b="1" i="0">
+              <a:rPr sz="1800" b="0" i="0">
                 <a:solidFill>
                   <a:srgbClr val="262422"/>
                 </a:solidFill>
-                <a:latin typeface="Libre Caslon Display"/>
+                <a:latin typeface="Georgia"/>
               </a:rPr>
               <a:t>The experiment</a:t>
             </a:r>
@@ -4540,7 +4540,7 @@
                 <a:solidFill>
                   <a:srgbClr val="56524B"/>
                 </a:solidFill>
-                <a:latin typeface="Karla"/>
+                <a:latin typeface="Calibri"/>
               </a:rPr>
               <a:t>Change in mmol per litre, compared with a diet high in olive-oil type fat</a:t>
             </a:r>
@@ -4627,7 +4627,7 @@
                 <a:solidFill>
                   <a:srgbClr val="34322F"/>
                 </a:solidFill>
-                <a:latin typeface="Karla"/>
+                <a:latin typeface="Calibri"/>
               </a:rPr>
               <a:t>ABOUT THIS</a:t>
             </a:r>
@@ -4670,7 +4670,7 @@
                 <a:solidFill>
                   <a:srgbClr val="262422"/>
                 </a:solidFill>
-                <a:latin typeface="Karla"/>
+                <a:latin typeface="Calibri"/>
               </a:rPr>
               <a:t>59 healthy volunteers ate three diets for three weeks each, and only one fat changed.</a:t>
             </a:r>
@@ -4713,7 +4713,7 @@
                 <a:solidFill>
                   <a:srgbClr val="8C877D"/>
                 </a:solidFill>
-                <a:latin typeface="Karla"/>
+                <a:latin typeface="Calibri"/>
               </a:rPr>
               <a:t>Source: Mensink and Katan, New England Journal of Medicine, 1990</a:t>
             </a:r>
@@ -4756,7 +4756,7 @@
                 <a:solidFill>
                   <a:srgbClr val="34322F"/>
                 </a:solidFill>
-                <a:latin typeface="Karla"/>
+                <a:latin typeface="Calibri"/>
               </a:rPr>
               <a:t>Read it as a group. Fill in the card C row on your evidence sheet, then move on the line.</a:t>
             </a:r>
@@ -4824,7 +4824,7 @@
                 <a:solidFill>
                   <a:srgbClr val="8C877D"/>
                 </a:solidFill>
-                <a:latin typeface="Karla"/>
+                <a:latin typeface="Calibri"/>
               </a:rPr>
               <a:t>The Pastoral Guide</a:t>
             </a:r>
@@ -4867,7 +4867,7 @@
                 <a:solidFill>
                   <a:srgbClr val="8C877D"/>
                 </a:solidFill>
-                <a:latin typeface="Karla"/>
+                <a:latin typeface="Calibri"/>
               </a:rPr>
               <a:t>10 / 19</a:t>
             </a:r>
@@ -4972,7 +4972,7 @@
                 <a:solidFill>
                   <a:srgbClr val="34322F"/>
                 </a:solidFill>
-                <a:latin typeface="Karla"/>
+                <a:latin typeface="Calibri"/>
               </a:rPr>
               <a:t>QUESTION THE HEADLINE  ·  LESSON 5 OF 5</a:t>
             </a:r>
@@ -4981,19 +4981,147 @@
       </p:sp>
       <p:sp>
         <p:nvSpPr>
-          <p:cNvPr id="4" name="Rounded Rectangle 3"/>
+          <p:cNvPr id="5" name="TextBox 4"/>
+          <p:cNvSpPr txBox="1"/>
+          <p:nvPr/>
+        </p:nvSpPr>
+        <p:spPr>
+          <a:xfrm>
+            <a:off x="685800" y="566928"/>
+            <a:ext cx="7772400" cy="434848"/>
+          </a:xfrm>
+          <a:prstGeom prst="rect">
+            <a:avLst/>
+          </a:prstGeom>
+          <a:noFill/>
+          <a:effectLst/>
+        </p:spPr>
+        <p:txBody>
+          <a:bodyPr wrap="square" anchor="t" lIns="0" rIns="0" tIns="0" bIns="0">
+            <a:spAutoFit/>
+          </a:bodyPr>
+          <a:lstStyle/>
+          <a:p>
+            <a:pPr algn="l">
+              <a:lnSpc>
+                <a:spcPct val="105000"/>
+              </a:lnSpc>
+              <a:spcAft>
+                <a:spcPts val="0"/>
+              </a:spcAft>
+            </a:pPr>
+            <a:r>
+              <a:rPr sz="2800" b="0" i="0">
+                <a:solidFill>
+                  <a:srgbClr val="262422"/>
+                </a:solidFill>
+                <a:latin typeface="Georgia"/>
+              </a:rPr>
+              <a:t>What do the numbers say?</a:t>
+            </a:r>
+          </a:p>
+        </p:txBody>
+      </p:sp>
+      <p:sp>
+        <p:nvSpPr>
+          <p:cNvPr id="6" name="TextBox 5"/>
+          <p:cNvSpPr txBox="1"/>
+          <p:nvPr/>
+        </p:nvSpPr>
+        <p:spPr>
+          <a:xfrm>
+            <a:off x="685800" y="1133856"/>
+            <a:ext cx="7772400" cy="274320"/>
+          </a:xfrm>
+          <a:prstGeom prst="rect">
+            <a:avLst/>
+          </a:prstGeom>
+          <a:noFill/>
+          <a:effectLst/>
+        </p:spPr>
+        <p:txBody>
+          <a:bodyPr wrap="square" anchor="t" lIns="0" rIns="0" tIns="0" bIns="0">
+            <a:spAutoFit/>
+          </a:bodyPr>
+          <a:lstStyle/>
+          <a:p>
+            <a:pPr algn="l">
+              <a:lnSpc>
+                <a:spcPct val="125000"/>
+              </a:lnSpc>
+              <a:spcAft>
+                <a:spcPts val="0"/>
+              </a:spcAft>
+            </a:pPr>
+            <a:r>
+              <a:rPr sz="1250" b="0" i="0">
+                <a:solidFill>
+                  <a:srgbClr val="56524B"/>
+                </a:solidFill>
+                <a:latin typeface="Calibri"/>
+              </a:rPr>
+              <a:t>Work them out in your group. Write your working on your evidence sheet.</a:t>
+            </a:r>
+          </a:p>
+        </p:txBody>
+      </p:sp>
+      <p:sp>
+        <p:nvSpPr>
+          <p:cNvPr id="7" name="Rectangle 6"/>
           <p:cNvSpPr/>
           <p:nvPr/>
         </p:nvSpPr>
         <p:spPr>
           <a:xfrm>
-            <a:off x="6406362" y="246888"/>
-            <a:ext cx="2051837" cy="237744"/>
-          </a:xfrm>
-          <a:prstGeom prst="roundRect">
-            <a:avLst>
-              <a:gd name="adj" fmla="val 50000"/>
-            </a:avLst>
+            <a:off x="685800" y="1481328"/>
+            <a:ext cx="7772400" cy="699516"/>
+          </a:xfrm>
+          <a:prstGeom prst="rect">
+            <a:avLst/>
+          </a:prstGeom>
+          <a:solidFill>
+            <a:srgbClr val="FFFFFF"/>
+          </a:solidFill>
+          <a:ln>
+            <a:noFill/>
+          </a:ln>
+          <a:effectLst/>
+        </p:spPr>
+        <p:style>
+          <a:lnRef idx="1">
+            <a:schemeClr val="accent1"/>
+          </a:lnRef>
+          <a:fillRef idx="3">
+            <a:schemeClr val="accent1"/>
+          </a:fillRef>
+          <a:effectRef idx="0">
+            <a:schemeClr val="accent1"/>
+          </a:effectRef>
+          <a:fontRef idx="minor">
+            <a:schemeClr val="lt1"/>
+          </a:fontRef>
+        </p:style>
+        <p:txBody>
+          <a:bodyPr rtlCol="0" anchor="ctr"/>
+          <a:lstStyle/>
+          <a:p>
+            <a:pPr algn="ctr"/>
+          </a:p>
+        </p:txBody>
+      </p:sp>
+      <p:sp>
+        <p:nvSpPr>
+          <p:cNvPr id="8" name="Oval 7"/>
+          <p:cNvSpPr/>
+          <p:nvPr/>
+        </p:nvSpPr>
+        <p:spPr>
+          <a:xfrm>
+            <a:off x="868680" y="1563624"/>
+            <a:ext cx="329184" cy="329184"/>
+          </a:xfrm>
+          <a:prstGeom prst="ellipse">
+            <a:avLst/>
           </a:prstGeom>
           <a:solidFill>
             <a:srgbClr val="34322F"/>
@@ -5018,32 +5146,66 @@
           </a:fontRef>
         </p:style>
         <p:txBody>
-          <a:bodyPr rtlCol="0" anchor="ctr" wrap="none" lIns="0" rIns="0" tIns="0" bIns="0"/>
+          <a:bodyPr rtlCol="0" anchor="ctr"/>
           <a:lstStyle/>
           <a:p>
             <a:pPr algn="ctr"/>
-            <a:r>
-              <a:rPr sz="950" b="1" spc="90">
+          </a:p>
+        </p:txBody>
+      </p:sp>
+      <p:sp>
+        <p:nvSpPr>
+          <p:cNvPr id="9" name="TextBox 8"/>
+          <p:cNvSpPr txBox="1"/>
+          <p:nvPr/>
+        </p:nvSpPr>
+        <p:spPr>
+          <a:xfrm>
+            <a:off x="868680" y="1636776"/>
+            <a:ext cx="329184" cy="182880"/>
+          </a:xfrm>
+          <a:prstGeom prst="rect">
+            <a:avLst/>
+          </a:prstGeom>
+          <a:noFill/>
+          <a:effectLst/>
+        </p:spPr>
+        <p:txBody>
+          <a:bodyPr wrap="square" anchor="t" lIns="0" rIns="0" tIns="0" bIns="0">
+            <a:spAutoFit/>
+          </a:bodyPr>
+          <a:lstStyle/>
+          <a:p>
+            <a:pPr algn="ctr">
+              <a:lnSpc>
+                <a:spcPct val="125000"/>
+              </a:lnSpc>
+              <a:spcAft>
+                <a:spcPts val="0"/>
+              </a:spcAft>
+            </a:pPr>
+            <a:r>
+              <a:rPr sz="1050" b="1" i="0">
                 <a:solidFill>
                   <a:srgbClr val="FFFDF7"/>
                 </a:solidFill>
-                <a:latin typeface="Karla"/>
-              </a:rPr>
-              <a:t>CRUNCH THE NUMBERS</a:t>
-            </a:r>
-          </a:p>
-        </p:txBody>
-      </p:sp>
-      <p:sp>
-        <p:nvSpPr>
-          <p:cNvPr id="5" name="TextBox 4"/>
-          <p:cNvSpPr txBox="1"/>
-          <p:nvPr/>
-        </p:nvSpPr>
-        <p:spPr>
-          <a:xfrm>
-            <a:off x="685800" y="566928"/>
-            <a:ext cx="7772400" cy="434848"/>
+                <a:latin typeface="Calibri"/>
+              </a:rPr>
+              <a:t>1</a:t>
+            </a:r>
+          </a:p>
+        </p:txBody>
+      </p:sp>
+      <p:sp>
+        <p:nvSpPr>
+          <p:cNvPr id="10" name="TextBox 9"/>
+          <p:cNvSpPr txBox="1"/>
+          <p:nvPr/>
+        </p:nvSpPr>
+        <p:spPr>
+          <a:xfrm>
+            <a:off x="1371600" y="1591056"/>
+            <a:ext cx="6903720" cy="480060"/>
           </a:xfrm>
           <a:prstGeom prst="rect">
             <a:avLst/>
@@ -5059,76 +5221,33 @@
           <a:p>
             <a:pPr algn="l">
               <a:lnSpc>
-                <a:spcPct val="105000"/>
-              </a:lnSpc>
-              <a:spcAft>
-                <a:spcPts val="0"/>
-              </a:spcAft>
-            </a:pPr>
-            <a:r>
-              <a:rPr sz="2800" b="1" i="0">
+                <a:spcPct val="120000"/>
+              </a:lnSpc>
+              <a:spcAft>
+                <a:spcPts val="0"/>
+              </a:spcAft>
+            </a:pPr>
+            <a:r>
+              <a:rPr sz="1500" b="1" i="0">
                 <a:solidFill>
                   <a:srgbClr val="262422"/>
                 </a:solidFill>
-                <a:latin typeface="Libre Caslon Display"/>
-              </a:rPr>
-              <a:t>What do the numbers say?</a:t>
-            </a:r>
-          </a:p>
-        </p:txBody>
-      </p:sp>
-      <p:sp>
-        <p:nvSpPr>
-          <p:cNvPr id="6" name="TextBox 5"/>
-          <p:cNvSpPr txBox="1"/>
-          <p:nvPr/>
-        </p:nvSpPr>
-        <p:spPr>
-          <a:xfrm>
-            <a:off x="685800" y="1133856"/>
-            <a:ext cx="7772400" cy="274320"/>
-          </a:xfrm>
-          <a:prstGeom prst="rect">
-            <a:avLst/>
-          </a:prstGeom>
-          <a:noFill/>
-          <a:effectLst/>
-        </p:spPr>
-        <p:txBody>
-          <a:bodyPr wrap="square" anchor="t" lIns="0" rIns="0" tIns="0" bIns="0">
-            <a:spAutoFit/>
-          </a:bodyPr>
-          <a:lstStyle/>
-          <a:p>
-            <a:pPr algn="l">
-              <a:lnSpc>
-                <a:spcPct val="125000"/>
-              </a:lnSpc>
-              <a:spcAft>
-                <a:spcPts val="0"/>
-              </a:spcAft>
-            </a:pPr>
-            <a:r>
-              <a:rPr sz="1250" b="0" i="0">
-                <a:solidFill>
-                  <a:srgbClr val="56524B"/>
-                </a:solidFill>
-                <a:latin typeface="Karla"/>
-              </a:rPr>
-              <a:t>Work them out in your group. Write your working on your evidence sheet.</a:t>
-            </a:r>
-          </a:p>
-        </p:txBody>
-      </p:sp>
-      <p:sp>
-        <p:nvSpPr>
-          <p:cNvPr id="7" name="Rectangle 6"/>
+                <a:latin typeface="Calibri"/>
+              </a:rPr>
+              <a:t>Which fat raised the “bad” LDL cholesterol more, trans fat (+0.37) or saturated fat (+0.47)?</a:t>
+            </a:r>
+          </a:p>
+        </p:txBody>
+      </p:sp>
+      <p:sp>
+        <p:nvSpPr>
+          <p:cNvPr id="11" name="Rectangle 10"/>
           <p:cNvSpPr/>
           <p:nvPr/>
         </p:nvSpPr>
         <p:spPr>
           <a:xfrm>
-            <a:off x="685800" y="1481328"/>
+            <a:off x="685800" y="2345436"/>
             <a:ext cx="7772400" cy="699516"/>
           </a:xfrm>
           <a:prstGeom prst="rect">
@@ -5166,13 +5285,13 @@
       </p:sp>
       <p:sp>
         <p:nvSpPr>
-          <p:cNvPr id="8" name="Oval 7"/>
+          <p:cNvPr id="12" name="Oval 11"/>
           <p:cNvSpPr/>
           <p:nvPr/>
         </p:nvSpPr>
         <p:spPr>
           <a:xfrm>
-            <a:off x="868680" y="1563624"/>
+            <a:off x="868680" y="2427732"/>
             <a:ext cx="329184" cy="329184"/>
           </a:xfrm>
           <a:prstGeom prst="ellipse">
@@ -5210,13 +5329,13 @@
       </p:sp>
       <p:sp>
         <p:nvSpPr>
-          <p:cNvPr id="9" name="TextBox 8"/>
-          <p:cNvSpPr txBox="1"/>
-          <p:nvPr/>
-        </p:nvSpPr>
-        <p:spPr>
-          <a:xfrm>
-            <a:off x="868680" y="1636776"/>
+          <p:cNvPr id="13" name="TextBox 12"/>
+          <p:cNvSpPr txBox="1"/>
+          <p:nvPr/>
+        </p:nvSpPr>
+        <p:spPr>
+          <a:xfrm>
+            <a:off x="868680" y="2500884"/>
             <a:ext cx="329184" cy="182880"/>
           </a:xfrm>
           <a:prstGeom prst="rect">
@@ -5244,22 +5363,22 @@
                 <a:solidFill>
                   <a:srgbClr val="FFFDF7"/>
                 </a:solidFill>
-                <a:latin typeface="Karla"/>
-              </a:rPr>
-              <a:t>1</a:t>
-            </a:r>
-          </a:p>
-        </p:txBody>
-      </p:sp>
-      <p:sp>
-        <p:nvSpPr>
-          <p:cNvPr id="10" name="TextBox 9"/>
-          <p:cNvSpPr txBox="1"/>
-          <p:nvPr/>
-        </p:nvSpPr>
-        <p:spPr>
-          <a:xfrm>
-            <a:off x="1371600" y="1591056"/>
+                <a:latin typeface="Calibri"/>
+              </a:rPr>
+              <a:t>2</a:t>
+            </a:r>
+          </a:p>
+        </p:txBody>
+      </p:sp>
+      <p:sp>
+        <p:nvSpPr>
+          <p:cNvPr id="14" name="TextBox 13"/>
+          <p:cNvSpPr txBox="1"/>
+          <p:nvPr/>
+        </p:nvSpPr>
+        <p:spPr>
+          <a:xfrm>
+            <a:off x="1371600" y="2455164"/>
             <a:ext cx="6903720" cy="480060"/>
           </a:xfrm>
           <a:prstGeom prst="rect">
@@ -5287,22 +5406,22 @@
                 <a:solidFill>
                   <a:srgbClr val="262422"/>
                 </a:solidFill>
-                <a:latin typeface="Karla"/>
-              </a:rPr>
-              <a:t>Which fat raised the “bad” LDL cholesterol more, trans fat (+0.37) or saturated fat (+0.47)?</a:t>
-            </a:r>
-          </a:p>
-        </p:txBody>
-      </p:sp>
-      <p:sp>
-        <p:nvSpPr>
-          <p:cNvPr id="11" name="Rectangle 10"/>
+                <a:latin typeface="Calibri"/>
+              </a:rPr>
+              <a:t>Which fat lowered the “good” HDL cholesterol, and by how much?</a:t>
+            </a:r>
+          </a:p>
+        </p:txBody>
+      </p:sp>
+      <p:sp>
+        <p:nvSpPr>
+          <p:cNvPr id="15" name="Rectangle 14"/>
           <p:cNvSpPr/>
           <p:nvPr/>
         </p:nvSpPr>
         <p:spPr>
           <a:xfrm>
-            <a:off x="685800" y="2345436"/>
+            <a:off x="685800" y="3209544"/>
             <a:ext cx="7772400" cy="699516"/>
           </a:xfrm>
           <a:prstGeom prst="rect">
@@ -5340,13 +5459,13 @@
       </p:sp>
       <p:sp>
         <p:nvSpPr>
-          <p:cNvPr id="12" name="Oval 11"/>
+          <p:cNvPr id="16" name="Oval 15"/>
           <p:cNvSpPr/>
           <p:nvPr/>
         </p:nvSpPr>
         <p:spPr>
           <a:xfrm>
-            <a:off x="868680" y="2427732"/>
+            <a:off x="868680" y="3291840"/>
             <a:ext cx="329184" cy="329184"/>
           </a:xfrm>
           <a:prstGeom prst="ellipse">
@@ -5384,180 +5503,6 @@
       </p:sp>
       <p:sp>
         <p:nvSpPr>
-          <p:cNvPr id="13" name="TextBox 12"/>
-          <p:cNvSpPr txBox="1"/>
-          <p:nvPr/>
-        </p:nvSpPr>
-        <p:spPr>
-          <a:xfrm>
-            <a:off x="868680" y="2500884"/>
-            <a:ext cx="329184" cy="182880"/>
-          </a:xfrm>
-          <a:prstGeom prst="rect">
-            <a:avLst/>
-          </a:prstGeom>
-          <a:noFill/>
-          <a:effectLst/>
-        </p:spPr>
-        <p:txBody>
-          <a:bodyPr wrap="square" anchor="t" lIns="0" rIns="0" tIns="0" bIns="0">
-            <a:spAutoFit/>
-          </a:bodyPr>
-          <a:lstStyle/>
-          <a:p>
-            <a:pPr algn="ctr">
-              <a:lnSpc>
-                <a:spcPct val="125000"/>
-              </a:lnSpc>
-              <a:spcAft>
-                <a:spcPts val="0"/>
-              </a:spcAft>
-            </a:pPr>
-            <a:r>
-              <a:rPr sz="1050" b="1" i="0">
-                <a:solidFill>
-                  <a:srgbClr val="FFFDF7"/>
-                </a:solidFill>
-                <a:latin typeface="Karla"/>
-              </a:rPr>
-              <a:t>2</a:t>
-            </a:r>
-          </a:p>
-        </p:txBody>
-      </p:sp>
-      <p:sp>
-        <p:nvSpPr>
-          <p:cNvPr id="14" name="TextBox 13"/>
-          <p:cNvSpPr txBox="1"/>
-          <p:nvPr/>
-        </p:nvSpPr>
-        <p:spPr>
-          <a:xfrm>
-            <a:off x="1371600" y="2455164"/>
-            <a:ext cx="6903720" cy="480060"/>
-          </a:xfrm>
-          <a:prstGeom prst="rect">
-            <a:avLst/>
-          </a:prstGeom>
-          <a:noFill/>
-          <a:effectLst/>
-        </p:spPr>
-        <p:txBody>
-          <a:bodyPr wrap="square" anchor="t" lIns="0" rIns="0" tIns="0" bIns="0">
-            <a:spAutoFit/>
-          </a:bodyPr>
-          <a:lstStyle/>
-          <a:p>
-            <a:pPr algn="l">
-              <a:lnSpc>
-                <a:spcPct val="120000"/>
-              </a:lnSpc>
-              <a:spcAft>
-                <a:spcPts val="0"/>
-              </a:spcAft>
-            </a:pPr>
-            <a:r>
-              <a:rPr sz="1500" b="1" i="0">
-                <a:solidFill>
-                  <a:srgbClr val="262422"/>
-                </a:solidFill>
-                <a:latin typeface="Karla"/>
-              </a:rPr>
-              <a:t>Which fat lowered the “good” HDL cholesterol, and by how much?</a:t>
-            </a:r>
-          </a:p>
-        </p:txBody>
-      </p:sp>
-      <p:sp>
-        <p:nvSpPr>
-          <p:cNvPr id="15" name="Rectangle 14"/>
-          <p:cNvSpPr/>
-          <p:nvPr/>
-        </p:nvSpPr>
-        <p:spPr>
-          <a:xfrm>
-            <a:off x="685800" y="3209544"/>
-            <a:ext cx="7772400" cy="699516"/>
-          </a:xfrm>
-          <a:prstGeom prst="rect">
-            <a:avLst/>
-          </a:prstGeom>
-          <a:solidFill>
-            <a:srgbClr val="FFFFFF"/>
-          </a:solidFill>
-          <a:ln>
-            <a:noFill/>
-          </a:ln>
-          <a:effectLst/>
-        </p:spPr>
-        <p:style>
-          <a:lnRef idx="1">
-            <a:schemeClr val="accent1"/>
-          </a:lnRef>
-          <a:fillRef idx="3">
-            <a:schemeClr val="accent1"/>
-          </a:fillRef>
-          <a:effectRef idx="0">
-            <a:schemeClr val="accent1"/>
-          </a:effectRef>
-          <a:fontRef idx="minor">
-            <a:schemeClr val="lt1"/>
-          </a:fontRef>
-        </p:style>
-        <p:txBody>
-          <a:bodyPr rtlCol="0" anchor="ctr"/>
-          <a:lstStyle/>
-          <a:p>
-            <a:pPr algn="ctr"/>
-          </a:p>
-        </p:txBody>
-      </p:sp>
-      <p:sp>
-        <p:nvSpPr>
-          <p:cNvPr id="16" name="Oval 15"/>
-          <p:cNvSpPr/>
-          <p:nvPr/>
-        </p:nvSpPr>
-        <p:spPr>
-          <a:xfrm>
-            <a:off x="868680" y="3291840"/>
-            <a:ext cx="329184" cy="329184"/>
-          </a:xfrm>
-          <a:prstGeom prst="ellipse">
-            <a:avLst/>
-          </a:prstGeom>
-          <a:solidFill>
-            <a:srgbClr val="34322F"/>
-          </a:solidFill>
-          <a:ln>
-            <a:noFill/>
-          </a:ln>
-          <a:effectLst/>
-        </p:spPr>
-        <p:style>
-          <a:lnRef idx="1">
-            <a:schemeClr val="accent1"/>
-          </a:lnRef>
-          <a:fillRef idx="3">
-            <a:schemeClr val="accent1"/>
-          </a:fillRef>
-          <a:effectRef idx="0">
-            <a:schemeClr val="accent1"/>
-          </a:effectRef>
-          <a:fontRef idx="minor">
-            <a:schemeClr val="lt1"/>
-          </a:fontRef>
-        </p:style>
-        <p:txBody>
-          <a:bodyPr rtlCol="0" anchor="ctr"/>
-          <a:lstStyle/>
-          <a:p>
-            <a:pPr algn="ctr"/>
-          </a:p>
-        </p:txBody>
-      </p:sp>
-      <p:sp>
-        <p:nvSpPr>
           <p:cNvPr id="17" name="TextBox 16"/>
           <p:cNvSpPr txBox="1"/>
           <p:nvPr/>
@@ -5592,7 +5537,7 @@
                 <a:solidFill>
                   <a:srgbClr val="FFFDF7"/>
                 </a:solidFill>
-                <a:latin typeface="Karla"/>
+                <a:latin typeface="Calibri"/>
               </a:rPr>
               <a:t>3</a:t>
             </a:r>
@@ -5635,7 +5580,7 @@
                 <a:solidFill>
                   <a:srgbClr val="262422"/>
                 </a:solidFill>
-                <a:latin typeface="Karla"/>
+                <a:latin typeface="Calibri"/>
               </a:rPr>
               <a:t>Add up how far each fat moved the two numbers in the wrong direction. Which comes out worse?</a:t>
             </a:r>
@@ -5703,7 +5648,7 @@
                 <a:solidFill>
                   <a:srgbClr val="8C877D"/>
                 </a:solidFill>
-                <a:latin typeface="Karla"/>
+                <a:latin typeface="Calibri"/>
               </a:rPr>
               <a:t>The Pastoral Guide</a:t>
             </a:r>
@@ -5746,7 +5691,7 @@
                 <a:solidFill>
                   <a:srgbClr val="8C877D"/>
                 </a:solidFill>
-                <a:latin typeface="Karla"/>
+                <a:latin typeface="Calibri"/>
               </a:rPr>
               <a:t>11 / 19</a:t>
             </a:r>
@@ -5851,7 +5796,7 @@
                 <a:solidFill>
                   <a:srgbClr val="34322F"/>
                 </a:solidFill>
-                <a:latin typeface="Karla"/>
+                <a:latin typeface="Calibri"/>
               </a:rPr>
               <a:t>QUESTION THE HEADLINE  ·  LESSON 5 OF 5</a:t>
             </a:r>
@@ -5906,7 +5851,7 @@
                 <a:solidFill>
                   <a:srgbClr val="FFFDF7"/>
                 </a:solidFill>
-                <a:latin typeface="Karla"/>
+                <a:latin typeface="Calibri"/>
               </a:rPr>
               <a:t>THE ANSWERS</a:t>
             </a:r>
@@ -5945,11 +5890,11 @@
               </a:spcAft>
             </a:pPr>
             <a:r>
-              <a:rPr sz="2800" b="1" i="0">
+              <a:rPr sz="2800" b="0" i="0">
                 <a:solidFill>
                   <a:srgbClr val="262422"/>
                 </a:solidFill>
-                <a:latin typeface="Libre Caslon Display"/>
+                <a:latin typeface="Georgia"/>
               </a:rPr>
               <a:t>Check your working</a:t>
             </a:r>
@@ -5992,7 +5937,7 @@
                 <a:solidFill>
                   <a:srgbClr val="56524B"/>
                 </a:solidFill>
-                <a:latin typeface="Karla"/>
+                <a:latin typeface="Calibri"/>
               </a:rPr>
               <a:t>Mark your own. A different method that gets the same answer is fine.</a:t>
             </a:r>
@@ -6123,7 +6068,7 @@
                 <a:solidFill>
                   <a:srgbClr val="FFFDF7"/>
                 </a:solidFill>
-                <a:latin typeface="Karla"/>
+                <a:latin typeface="Calibri"/>
               </a:rPr>
               <a:t>1</a:t>
             </a:r>
@@ -6166,7 +6111,7 @@
                 <a:solidFill>
                   <a:srgbClr val="262422"/>
                 </a:solidFill>
-                <a:latin typeface="Karla"/>
+                <a:latin typeface="Calibri"/>
               </a:rPr>
               <a:t>Which fat raised the “bad” LDL cholesterol more, trans fat (+0.37) or saturated fat (+0.47)?</a:t>
             </a:r>
@@ -6209,7 +6154,7 @@
                 <a:solidFill>
                   <a:srgbClr val="34322F"/>
                 </a:solidFill>
-                <a:latin typeface="Karla"/>
+                <a:latin typeface="Calibri"/>
               </a:rPr>
               <a:t>Saturated fat, by 0.10.</a:t>
             </a:r>
@@ -6340,7 +6285,7 @@
                 <a:solidFill>
                   <a:srgbClr val="FFFDF7"/>
                 </a:solidFill>
-                <a:latin typeface="Karla"/>
+                <a:latin typeface="Calibri"/>
               </a:rPr>
               <a:t>2</a:t>
             </a:r>
@@ -6383,7 +6328,7 @@
                 <a:solidFill>
                   <a:srgbClr val="262422"/>
                 </a:solidFill>
-                <a:latin typeface="Karla"/>
+                <a:latin typeface="Calibri"/>
               </a:rPr>
               <a:t>Which fat lowered the “good” HDL cholesterol, and by how much?</a:t>
             </a:r>
@@ -6426,7 +6371,7 @@
                 <a:solidFill>
                   <a:srgbClr val="34322F"/>
                 </a:solidFill>
-                <a:latin typeface="Karla"/>
+                <a:latin typeface="Calibri"/>
               </a:rPr>
               <a:t>Trans fat, by 0.17. Saturated fat did not change it.</a:t>
             </a:r>
@@ -6557,7 +6502,7 @@
                 <a:solidFill>
                   <a:srgbClr val="FFFDF7"/>
                 </a:solidFill>
-                <a:latin typeface="Karla"/>
+                <a:latin typeface="Calibri"/>
               </a:rPr>
               <a:t>3</a:t>
             </a:r>
@@ -6600,7 +6545,7 @@
                 <a:solidFill>
                   <a:srgbClr val="262422"/>
                 </a:solidFill>
-                <a:latin typeface="Karla"/>
+                <a:latin typeface="Calibri"/>
               </a:rPr>
               <a:t>Add up how far each fat moved the two numbers in the wrong direction. Which comes out worse?</a:t>
             </a:r>
@@ -6643,7 +6588,7 @@
                 <a:solidFill>
                   <a:srgbClr val="34322F"/>
                 </a:solidFill>
-                <a:latin typeface="Karla"/>
+                <a:latin typeface="Calibri"/>
               </a:rPr>
               <a:t>Trans fat: 0.37 + 0.17 = 0.54. Saturated fat: 0.47 + 0 = 0.47. Trans fat is worse, but neither is harmless.</a:t>
             </a:r>
@@ -6711,7 +6656,7 @@
                 <a:solidFill>
                   <a:srgbClr val="8C877D"/>
                 </a:solidFill>
-                <a:latin typeface="Karla"/>
+                <a:latin typeface="Calibri"/>
               </a:rPr>
               <a:t>The Pastoral Guide</a:t>
             </a:r>
@@ -6754,7 +6699,7 @@
                 <a:solidFill>
                   <a:srgbClr val="8C877D"/>
                 </a:solidFill>
-                <a:latin typeface="Karla"/>
+                <a:latin typeface="Calibri"/>
               </a:rPr>
               <a:t>12 / 19</a:t>
             </a:r>
@@ -6859,7 +6804,7 @@
                 <a:solidFill>
                   <a:srgbClr val="34322F"/>
                 </a:solidFill>
-                <a:latin typeface="Karla"/>
+                <a:latin typeface="Calibri"/>
               </a:rPr>
               <a:t>QUESTION THE HEADLINE  ·  LESSON 5 OF 5</a:t>
             </a:r>
@@ -6914,7 +6859,7 @@
                 <a:solidFill>
                   <a:srgbClr val="FFFDF7"/>
                 </a:solidFill>
-                <a:latin typeface="Karla"/>
+                <a:latin typeface="Calibri"/>
               </a:rPr>
               <a:t>ROUND 4 OF 4</a:t>
             </a:r>
@@ -7001,7 +6946,7 @@
                 <a:solidFill>
                   <a:srgbClr val="FFFDF7"/>
                 </a:solidFill>
-                <a:latin typeface="Karla"/>
+                <a:latin typeface="Calibri"/>
               </a:rPr>
               <a:t>EVIDENCE D</a:t>
             </a:r>
@@ -7128,11 +7073,11 @@
               </a:spcAft>
             </a:pPr>
             <a:r>
-              <a:rPr sz="2200" b="1" i="0">
+              <a:rPr sz="2200" b="0" i="0">
                 <a:solidFill>
                   <a:srgbClr val="262422"/>
                 </a:solidFill>
-                <a:latin typeface="Libre Caslon Display"/>
+                <a:latin typeface="Georgia"/>
               </a:rPr>
               <a:t>What happened</a:t>
             </a:r>
@@ -7218,7 +7163,7 @@
                 <a:solidFill>
                   <a:srgbClr val="8C877D"/>
                 </a:solidFill>
-                <a:latin typeface="Karla"/>
+                <a:latin typeface="Calibri"/>
               </a:rPr>
               <a:t>Source: WHO trans fat fact sheet, 2024; US FDA; Wikipedia, Crisco</a:t>
             </a:r>
@@ -7261,7 +7206,7 @@
                 <a:solidFill>
                   <a:srgbClr val="34322F"/>
                 </a:solidFill>
-                <a:latin typeface="Karla"/>
+                <a:latin typeface="Calibri"/>
               </a:rPr>
               <a:t>Read it as a group. Fill in the card D row on your evidence sheet, then move on the line.</a:t>
             </a:r>
@@ -7329,7 +7274,7 @@
                 <a:solidFill>
                   <a:srgbClr val="8C877D"/>
                 </a:solidFill>
-                <a:latin typeface="Karla"/>
+                <a:latin typeface="Calibri"/>
               </a:rPr>
               <a:t>The Pastoral Guide</a:t>
             </a:r>
@@ -7372,7 +7317,7 @@
                 <a:solidFill>
                   <a:srgbClr val="8C877D"/>
                 </a:solidFill>
-                <a:latin typeface="Karla"/>
+                <a:latin typeface="Calibri"/>
               </a:rPr>
               <a:t>13 / 19</a:t>
             </a:r>
@@ -7477,7 +7422,7 @@
                 <a:solidFill>
                   <a:srgbClr val="34322F"/>
                 </a:solidFill>
-                <a:latin typeface="Karla"/>
+                <a:latin typeface="Calibri"/>
               </a:rPr>
               <a:t>QUESTION THE HEADLINE  ·  LESSON 5 OF 5</a:t>
             </a:r>
@@ -7486,19 +7431,147 @@
       </p:sp>
       <p:sp>
         <p:nvSpPr>
-          <p:cNvPr id="4" name="Rounded Rectangle 3"/>
+          <p:cNvPr id="5" name="TextBox 4"/>
+          <p:cNvSpPr txBox="1"/>
+          <p:nvPr/>
+        </p:nvSpPr>
+        <p:spPr>
+          <a:xfrm>
+            <a:off x="685800" y="566928"/>
+            <a:ext cx="7772400" cy="434848"/>
+          </a:xfrm>
+          <a:prstGeom prst="rect">
+            <a:avLst/>
+          </a:prstGeom>
+          <a:noFill/>
+          <a:effectLst/>
+        </p:spPr>
+        <p:txBody>
+          <a:bodyPr wrap="square" anchor="t" lIns="0" rIns="0" tIns="0" bIns="0">
+            <a:spAutoFit/>
+          </a:bodyPr>
+          <a:lstStyle/>
+          <a:p>
+            <a:pPr algn="l">
+              <a:lnSpc>
+                <a:spcPct val="105000"/>
+              </a:lnSpc>
+              <a:spcAft>
+                <a:spcPts val="0"/>
+              </a:spcAft>
+            </a:pPr>
+            <a:r>
+              <a:rPr sz="2800" b="0" i="0">
+                <a:solidFill>
+                  <a:srgbClr val="262422"/>
+                </a:solidFill>
+                <a:latin typeface="Georgia"/>
+              </a:rPr>
+              <a:t>Write the real front page</a:t>
+            </a:r>
+          </a:p>
+        </p:txBody>
+      </p:sp>
+      <p:sp>
+        <p:nvSpPr>
+          <p:cNvPr id="6" name="TextBox 5"/>
+          <p:cNvSpPr txBox="1"/>
+          <p:nvPr/>
+        </p:nvSpPr>
+        <p:spPr>
+          <a:xfrm>
+            <a:off x="685800" y="1115568"/>
+            <a:ext cx="7772400" cy="274320"/>
+          </a:xfrm>
+          <a:prstGeom prst="rect">
+            <a:avLst/>
+          </a:prstGeom>
+          <a:noFill/>
+          <a:effectLst/>
+        </p:spPr>
+        <p:txBody>
+          <a:bodyPr wrap="square" anchor="t" lIns="0" rIns="0" tIns="0" bIns="0">
+            <a:spAutoFit/>
+          </a:bodyPr>
+          <a:lstStyle/>
+          <a:p>
+            <a:pPr algn="l">
+              <a:lnSpc>
+                <a:spcPct val="125000"/>
+              </a:lnSpc>
+              <a:spcAft>
+                <a:spcPts val="0"/>
+              </a:spcAft>
+            </a:pPr>
+            <a:r>
+              <a:rPr sz="1300" b="0" i="0">
+                <a:solidFill>
+                  <a:srgbClr val="56524B"/>
+                </a:solidFill>
+                <a:latin typeface="Calibri"/>
+              </a:rPr>
+              <a:t>On your front page sheet, on your own or with one partner.</a:t>
+            </a:r>
+          </a:p>
+        </p:txBody>
+      </p:sp>
+      <p:sp>
+        <p:nvSpPr>
+          <p:cNvPr id="7" name="Rectangle 6"/>
           <p:cNvSpPr/>
           <p:nvPr/>
         </p:nvSpPr>
         <p:spPr>
           <a:xfrm>
-            <a:off x="7280579" y="246888"/>
-            <a:ext cx="1177620" cy="237744"/>
-          </a:xfrm>
-          <a:prstGeom prst="roundRect">
-            <a:avLst>
-              <a:gd name="adj" fmla="val 50000"/>
-            </a:avLst>
+            <a:off x="685800" y="1499616"/>
+            <a:ext cx="7772400" cy="676656"/>
+          </a:xfrm>
+          <a:prstGeom prst="rect">
+            <a:avLst/>
+          </a:prstGeom>
+          <a:solidFill>
+            <a:srgbClr val="FFFDF7"/>
+          </a:solidFill>
+          <a:ln>
+            <a:noFill/>
+          </a:ln>
+          <a:effectLst/>
+        </p:spPr>
+        <p:style>
+          <a:lnRef idx="1">
+            <a:schemeClr val="accent1"/>
+          </a:lnRef>
+          <a:fillRef idx="3">
+            <a:schemeClr val="accent1"/>
+          </a:fillRef>
+          <a:effectRef idx="0">
+            <a:schemeClr val="accent1"/>
+          </a:effectRef>
+          <a:fontRef idx="minor">
+            <a:schemeClr val="lt1"/>
+          </a:fontRef>
+        </p:style>
+        <p:txBody>
+          <a:bodyPr rtlCol="0" anchor="ctr"/>
+          <a:lstStyle/>
+          <a:p>
+            <a:pPr algn="ctr"/>
+          </a:p>
+        </p:txBody>
+      </p:sp>
+      <p:sp>
+        <p:nvSpPr>
+          <p:cNvPr id="8" name="Oval 7"/>
+          <p:cNvSpPr/>
+          <p:nvPr/>
+        </p:nvSpPr>
+        <p:spPr>
+          <a:xfrm>
+            <a:off x="868680" y="1636775"/>
+            <a:ext cx="402336" cy="402336"/>
+          </a:xfrm>
+          <a:prstGeom prst="ellipse">
+            <a:avLst/>
           </a:prstGeom>
           <a:solidFill>
             <a:srgbClr val="34322F"/>
@@ -7523,32 +7596,66 @@
           </a:fontRef>
         </p:style>
         <p:txBody>
-          <a:bodyPr rtlCol="0" anchor="ctr" wrap="none" lIns="0" rIns="0" tIns="0" bIns="0"/>
+          <a:bodyPr rtlCol="0" anchor="ctr"/>
           <a:lstStyle/>
           <a:p>
             <a:pPr algn="ctr"/>
-            <a:r>
-              <a:rPr sz="950" b="1" spc="90">
+          </a:p>
+        </p:txBody>
+      </p:sp>
+      <p:sp>
+        <p:nvSpPr>
+          <p:cNvPr id="9" name="TextBox 8"/>
+          <p:cNvSpPr txBox="1"/>
+          <p:nvPr/>
+        </p:nvSpPr>
+        <p:spPr>
+          <a:xfrm>
+            <a:off x="868680" y="1732787"/>
+            <a:ext cx="402336" cy="219456"/>
+          </a:xfrm>
+          <a:prstGeom prst="rect">
+            <a:avLst/>
+          </a:prstGeom>
+          <a:noFill/>
+          <a:effectLst/>
+        </p:spPr>
+        <p:txBody>
+          <a:bodyPr wrap="square" anchor="t" lIns="0" rIns="0" tIns="0" bIns="0">
+            <a:spAutoFit/>
+          </a:bodyPr>
+          <a:lstStyle/>
+          <a:p>
+            <a:pPr algn="ctr">
+              <a:lnSpc>
+                <a:spcPct val="125000"/>
+              </a:lnSpc>
+              <a:spcAft>
+                <a:spcPts val="0"/>
+              </a:spcAft>
+            </a:pPr>
+            <a:r>
+              <a:rPr sz="1150" b="1" i="0">
                 <a:solidFill>
                   <a:srgbClr val="FFFDF7"/>
                 </a:solidFill>
-                <a:latin typeface="Karla"/>
-              </a:rPr>
-              <a:t>YOUR TURN</a:t>
-            </a:r>
-          </a:p>
-        </p:txBody>
-      </p:sp>
-      <p:sp>
-        <p:nvSpPr>
-          <p:cNvPr id="5" name="TextBox 4"/>
-          <p:cNvSpPr txBox="1"/>
-          <p:nvPr/>
-        </p:nvSpPr>
-        <p:spPr>
-          <a:xfrm>
-            <a:off x="685800" y="566928"/>
-            <a:ext cx="7772400" cy="434848"/>
+                <a:latin typeface="Calibri"/>
+              </a:rPr>
+              <a:t>1</a:t>
+            </a:r>
+          </a:p>
+        </p:txBody>
+      </p:sp>
+      <p:sp>
+        <p:nvSpPr>
+          <p:cNvPr id="10" name="TextBox 9"/>
+          <p:cNvSpPr txBox="1"/>
+          <p:nvPr/>
+        </p:nvSpPr>
+        <p:spPr>
+          <a:xfrm>
+            <a:off x="1417320" y="1600200"/>
+            <a:ext cx="6821424" cy="237744"/>
           </a:xfrm>
           <a:prstGeom prst="rect">
             <a:avLst/>
@@ -7564,34 +7671,34 @@
           <a:p>
             <a:pPr algn="l">
               <a:lnSpc>
-                <a:spcPct val="105000"/>
-              </a:lnSpc>
-              <a:spcAft>
-                <a:spcPts val="0"/>
-              </a:spcAft>
-            </a:pPr>
-            <a:r>
-              <a:rPr sz="2800" b="1" i="0">
-                <a:solidFill>
-                  <a:srgbClr val="262422"/>
-                </a:solidFill>
-                <a:latin typeface="Libre Caslon Display"/>
-              </a:rPr>
-              <a:t>Write the real front page</a:t>
-            </a:r>
-          </a:p>
-        </p:txBody>
-      </p:sp>
-      <p:sp>
-        <p:nvSpPr>
-          <p:cNvPr id="6" name="TextBox 5"/>
-          <p:cNvSpPr txBox="1"/>
-          <p:nvPr/>
-        </p:nvSpPr>
-        <p:spPr>
-          <a:xfrm>
-            <a:off x="685800" y="1115568"/>
-            <a:ext cx="7772400" cy="274320"/>
+                <a:spcPct val="125000"/>
+              </a:lnSpc>
+              <a:spcAft>
+                <a:spcPts val="0"/>
+              </a:spcAft>
+            </a:pPr>
+            <a:r>
+              <a:rPr sz="1300" b="0" i="0">
+                <a:solidFill>
+                  <a:srgbClr val="34322F"/>
+                </a:solidFill>
+                <a:latin typeface="Georgia"/>
+              </a:rPr>
+              <a:t>A headline that is true to the evidence</a:t>
+            </a:r>
+          </a:p>
+        </p:txBody>
+      </p:sp>
+      <p:sp>
+        <p:nvSpPr>
+          <p:cNvPr id="11" name="TextBox 10"/>
+          <p:cNvSpPr txBox="1"/>
+          <p:nvPr/>
+        </p:nvSpPr>
+        <p:spPr>
+          <a:xfrm>
+            <a:off x="1417320" y="1847088"/>
+            <a:ext cx="6821424" cy="256031"/>
           </a:xfrm>
           <a:prstGeom prst="rect">
             <a:avLst/>
@@ -7614,26 +7721,26 @@
               </a:spcAft>
             </a:pPr>
             <a:r>
-              <a:rPr sz="1300" b="0" i="0">
+              <a:rPr sz="1100" b="0" i="0">
                 <a:solidFill>
                   <a:srgbClr val="56524B"/>
                 </a:solidFill>
-                <a:latin typeface="Karla"/>
-              </a:rPr>
-              <a:t>On your front page sheet, on your own or with one partner.</a:t>
-            </a:r>
-          </a:p>
-        </p:txBody>
-      </p:sp>
-      <p:sp>
-        <p:nvSpPr>
-          <p:cNvPr id="7" name="Rectangle 6"/>
+                <a:latin typeface="Calibri"/>
+              </a:rPr>
+              <a:t>No bigger than the evidence. If you are not sure, the headline can say so.</a:t>
+            </a:r>
+          </a:p>
+        </p:txBody>
+      </p:sp>
+      <p:sp>
+        <p:nvSpPr>
+          <p:cNvPr id="12" name="Rectangle 11"/>
           <p:cNvSpPr/>
           <p:nvPr/>
         </p:nvSpPr>
         <p:spPr>
           <a:xfrm>
-            <a:off x="685800" y="1499616"/>
+            <a:off x="685800" y="2304288"/>
             <a:ext cx="7772400" cy="676656"/>
           </a:xfrm>
           <a:prstGeom prst="rect">
@@ -7671,13 +7778,13 @@
       </p:sp>
       <p:sp>
         <p:nvSpPr>
-          <p:cNvPr id="8" name="Oval 7"/>
+          <p:cNvPr id="13" name="Oval 12"/>
           <p:cNvSpPr/>
           <p:nvPr/>
         </p:nvSpPr>
         <p:spPr>
           <a:xfrm>
-            <a:off x="868680" y="1636775"/>
+            <a:off x="868680" y="2441448"/>
             <a:ext cx="402336" cy="402336"/>
           </a:xfrm>
           <a:prstGeom prst="ellipse">
@@ -7715,13 +7822,13 @@
       </p:sp>
       <p:sp>
         <p:nvSpPr>
-          <p:cNvPr id="9" name="TextBox 8"/>
-          <p:cNvSpPr txBox="1"/>
-          <p:nvPr/>
-        </p:nvSpPr>
-        <p:spPr>
-          <a:xfrm>
-            <a:off x="868680" y="1732787"/>
+          <p:cNvPr id="14" name="TextBox 13"/>
+          <p:cNvSpPr txBox="1"/>
+          <p:nvPr/>
+        </p:nvSpPr>
+        <p:spPr>
+          <a:xfrm>
+            <a:off x="868680" y="2537460"/>
             <a:ext cx="402336" cy="219456"/>
           </a:xfrm>
           <a:prstGeom prst="rect">
@@ -7749,22 +7856,22 @@
                 <a:solidFill>
                   <a:srgbClr val="FFFDF7"/>
                 </a:solidFill>
-                <a:latin typeface="Karla"/>
-              </a:rPr>
-              <a:t>1</a:t>
-            </a:r>
-          </a:p>
-        </p:txBody>
-      </p:sp>
-      <p:sp>
-        <p:nvSpPr>
-          <p:cNvPr id="10" name="TextBox 9"/>
-          <p:cNvSpPr txBox="1"/>
-          <p:nvPr/>
-        </p:nvSpPr>
-        <p:spPr>
-          <a:xfrm>
-            <a:off x="1417320" y="1600200"/>
+                <a:latin typeface="Calibri"/>
+              </a:rPr>
+              <a:t>2</a:t>
+            </a:r>
+          </a:p>
+        </p:txBody>
+      </p:sp>
+      <p:sp>
+        <p:nvSpPr>
+          <p:cNvPr id="15" name="TextBox 14"/>
+          <p:cNvSpPr txBox="1"/>
+          <p:nvPr/>
+        </p:nvSpPr>
+        <p:spPr>
+          <a:xfrm>
+            <a:off x="1417320" y="2404872"/>
             <a:ext cx="6821424" cy="237744"/>
           </a:xfrm>
           <a:prstGeom prst="rect">
@@ -7788,26 +7895,26 @@
               </a:spcAft>
             </a:pPr>
             <a:r>
-              <a:rPr sz="1300" b="1" i="0">
+              <a:rPr sz="1300" b="0" i="0">
                 <a:solidFill>
                   <a:srgbClr val="34322F"/>
                 </a:solidFill>
-                <a:latin typeface="Libre Caslon Display"/>
-              </a:rPr>
-              <a:t>A headline that is true to the evidence</a:t>
-            </a:r>
-          </a:p>
-        </p:txBody>
-      </p:sp>
-      <p:sp>
-        <p:nvSpPr>
-          <p:cNvPr id="11" name="TextBox 10"/>
-          <p:cNvSpPr txBox="1"/>
-          <p:nvPr/>
-        </p:nvSpPr>
-        <p:spPr>
-          <a:xfrm>
-            <a:off x="1417320" y="1847088"/>
+                <a:latin typeface="Georgia"/>
+              </a:rPr>
+              <a:t>One line under it that sums up the story</a:t>
+            </a:r>
+          </a:p>
+        </p:txBody>
+      </p:sp>
+      <p:sp>
+        <p:nvSpPr>
+          <p:cNvPr id="16" name="TextBox 15"/>
+          <p:cNvSpPr txBox="1"/>
+          <p:nvPr/>
+        </p:nvSpPr>
+        <p:spPr>
+          <a:xfrm>
+            <a:off x="1417320" y="2651760"/>
             <a:ext cx="6821424" cy="256031"/>
           </a:xfrm>
           <a:prstGeom prst="rect">
@@ -7835,22 +7942,22 @@
                 <a:solidFill>
                   <a:srgbClr val="56524B"/>
                 </a:solidFill>
-                <a:latin typeface="Karla"/>
-              </a:rPr>
-              <a:t>No bigger than the evidence. If you are not sure, the headline can say so.</a:t>
-            </a:r>
-          </a:p>
-        </p:txBody>
-      </p:sp>
-      <p:sp>
-        <p:nvSpPr>
-          <p:cNvPr id="12" name="Rectangle 11"/>
+                <a:latin typeface="Calibri"/>
+              </a:rPr>
+              <a:t>Who made the claim, and what they stood to gain.</a:t>
+            </a:r>
+          </a:p>
+        </p:txBody>
+      </p:sp>
+      <p:sp>
+        <p:nvSpPr>
+          <p:cNvPr id="17" name="Rectangle 16"/>
           <p:cNvSpPr/>
           <p:nvPr/>
         </p:nvSpPr>
         <p:spPr>
           <a:xfrm>
-            <a:off x="685800" y="2304288"/>
+            <a:off x="685800" y="3108960"/>
             <a:ext cx="7772400" cy="676656"/>
           </a:xfrm>
           <a:prstGeom prst="rect">
@@ -7888,13 +7995,13 @@
       </p:sp>
       <p:sp>
         <p:nvSpPr>
-          <p:cNvPr id="13" name="Oval 12"/>
+          <p:cNvPr id="18" name="Oval 17"/>
           <p:cNvSpPr/>
           <p:nvPr/>
         </p:nvSpPr>
         <p:spPr>
           <a:xfrm>
-            <a:off x="868680" y="2441448"/>
+            <a:off x="868680" y="3246120"/>
             <a:ext cx="402336" cy="402336"/>
           </a:xfrm>
           <a:prstGeom prst="ellipse">
@@ -7932,223 +8039,6 @@
       </p:sp>
       <p:sp>
         <p:nvSpPr>
-          <p:cNvPr id="14" name="TextBox 13"/>
-          <p:cNvSpPr txBox="1"/>
-          <p:nvPr/>
-        </p:nvSpPr>
-        <p:spPr>
-          <a:xfrm>
-            <a:off x="868680" y="2537460"/>
-            <a:ext cx="402336" cy="219456"/>
-          </a:xfrm>
-          <a:prstGeom prst="rect">
-            <a:avLst/>
-          </a:prstGeom>
-          <a:noFill/>
-          <a:effectLst/>
-        </p:spPr>
-        <p:txBody>
-          <a:bodyPr wrap="square" anchor="t" lIns="0" rIns="0" tIns="0" bIns="0">
-            <a:spAutoFit/>
-          </a:bodyPr>
-          <a:lstStyle/>
-          <a:p>
-            <a:pPr algn="ctr">
-              <a:lnSpc>
-                <a:spcPct val="125000"/>
-              </a:lnSpc>
-              <a:spcAft>
-                <a:spcPts val="0"/>
-              </a:spcAft>
-            </a:pPr>
-            <a:r>
-              <a:rPr sz="1150" b="1" i="0">
-                <a:solidFill>
-                  <a:srgbClr val="FFFDF7"/>
-                </a:solidFill>
-                <a:latin typeface="Karla"/>
-              </a:rPr>
-              <a:t>2</a:t>
-            </a:r>
-          </a:p>
-        </p:txBody>
-      </p:sp>
-      <p:sp>
-        <p:nvSpPr>
-          <p:cNvPr id="15" name="TextBox 14"/>
-          <p:cNvSpPr txBox="1"/>
-          <p:nvPr/>
-        </p:nvSpPr>
-        <p:spPr>
-          <a:xfrm>
-            <a:off x="1417320" y="2404872"/>
-            <a:ext cx="6821424" cy="237744"/>
-          </a:xfrm>
-          <a:prstGeom prst="rect">
-            <a:avLst/>
-          </a:prstGeom>
-          <a:noFill/>
-          <a:effectLst/>
-        </p:spPr>
-        <p:txBody>
-          <a:bodyPr wrap="square" anchor="t" lIns="0" rIns="0" tIns="0" bIns="0">
-            <a:spAutoFit/>
-          </a:bodyPr>
-          <a:lstStyle/>
-          <a:p>
-            <a:pPr algn="l">
-              <a:lnSpc>
-                <a:spcPct val="125000"/>
-              </a:lnSpc>
-              <a:spcAft>
-                <a:spcPts val="0"/>
-              </a:spcAft>
-            </a:pPr>
-            <a:r>
-              <a:rPr sz="1300" b="1" i="0">
-                <a:solidFill>
-                  <a:srgbClr val="34322F"/>
-                </a:solidFill>
-                <a:latin typeface="Libre Caslon Display"/>
-              </a:rPr>
-              <a:t>One line under it that sums up the story</a:t>
-            </a:r>
-          </a:p>
-        </p:txBody>
-      </p:sp>
-      <p:sp>
-        <p:nvSpPr>
-          <p:cNvPr id="16" name="TextBox 15"/>
-          <p:cNvSpPr txBox="1"/>
-          <p:nvPr/>
-        </p:nvSpPr>
-        <p:spPr>
-          <a:xfrm>
-            <a:off x="1417320" y="2651760"/>
-            <a:ext cx="6821424" cy="256031"/>
-          </a:xfrm>
-          <a:prstGeom prst="rect">
-            <a:avLst/>
-          </a:prstGeom>
-          <a:noFill/>
-          <a:effectLst/>
-        </p:spPr>
-        <p:txBody>
-          <a:bodyPr wrap="square" anchor="t" lIns="0" rIns="0" tIns="0" bIns="0">
-            <a:spAutoFit/>
-          </a:bodyPr>
-          <a:lstStyle/>
-          <a:p>
-            <a:pPr algn="l">
-              <a:lnSpc>
-                <a:spcPct val="125000"/>
-              </a:lnSpc>
-              <a:spcAft>
-                <a:spcPts val="0"/>
-              </a:spcAft>
-            </a:pPr>
-            <a:r>
-              <a:rPr sz="1100" b="0" i="0">
-                <a:solidFill>
-                  <a:srgbClr val="56524B"/>
-                </a:solidFill>
-                <a:latin typeface="Karla"/>
-              </a:rPr>
-              <a:t>Who made the claim, and what they stood to gain.</a:t>
-            </a:r>
-          </a:p>
-        </p:txBody>
-      </p:sp>
-      <p:sp>
-        <p:nvSpPr>
-          <p:cNvPr id="17" name="Rectangle 16"/>
-          <p:cNvSpPr/>
-          <p:nvPr/>
-        </p:nvSpPr>
-        <p:spPr>
-          <a:xfrm>
-            <a:off x="685800" y="3108960"/>
-            <a:ext cx="7772400" cy="676656"/>
-          </a:xfrm>
-          <a:prstGeom prst="rect">
-            <a:avLst/>
-          </a:prstGeom>
-          <a:solidFill>
-            <a:srgbClr val="FFFDF7"/>
-          </a:solidFill>
-          <a:ln>
-            <a:noFill/>
-          </a:ln>
-          <a:effectLst/>
-        </p:spPr>
-        <p:style>
-          <a:lnRef idx="1">
-            <a:schemeClr val="accent1"/>
-          </a:lnRef>
-          <a:fillRef idx="3">
-            <a:schemeClr val="accent1"/>
-          </a:fillRef>
-          <a:effectRef idx="0">
-            <a:schemeClr val="accent1"/>
-          </a:effectRef>
-          <a:fontRef idx="minor">
-            <a:schemeClr val="lt1"/>
-          </a:fontRef>
-        </p:style>
-        <p:txBody>
-          <a:bodyPr rtlCol="0" anchor="ctr"/>
-          <a:lstStyle/>
-          <a:p>
-            <a:pPr algn="ctr"/>
-          </a:p>
-        </p:txBody>
-      </p:sp>
-      <p:sp>
-        <p:nvSpPr>
-          <p:cNvPr id="18" name="Oval 17"/>
-          <p:cNvSpPr/>
-          <p:nvPr/>
-        </p:nvSpPr>
-        <p:spPr>
-          <a:xfrm>
-            <a:off x="868680" y="3246120"/>
-            <a:ext cx="402336" cy="402336"/>
-          </a:xfrm>
-          <a:prstGeom prst="ellipse">
-            <a:avLst/>
-          </a:prstGeom>
-          <a:solidFill>
-            <a:srgbClr val="34322F"/>
-          </a:solidFill>
-          <a:ln>
-            <a:noFill/>
-          </a:ln>
-          <a:effectLst/>
-        </p:spPr>
-        <p:style>
-          <a:lnRef idx="1">
-            <a:schemeClr val="accent1"/>
-          </a:lnRef>
-          <a:fillRef idx="3">
-            <a:schemeClr val="accent1"/>
-          </a:fillRef>
-          <a:effectRef idx="0">
-            <a:schemeClr val="accent1"/>
-          </a:effectRef>
-          <a:fontRef idx="minor">
-            <a:schemeClr val="lt1"/>
-          </a:fontRef>
-        </p:style>
-        <p:txBody>
-          <a:bodyPr rtlCol="0" anchor="ctr"/>
-          <a:lstStyle/>
-          <a:p>
-            <a:pPr algn="ctr"/>
-          </a:p>
-        </p:txBody>
-      </p:sp>
-      <p:sp>
-        <p:nvSpPr>
           <p:cNvPr id="19" name="TextBox 18"/>
           <p:cNvSpPr txBox="1"/>
           <p:nvPr/>
@@ -8183,7 +8073,7 @@
                 <a:solidFill>
                   <a:srgbClr val="FFFDF7"/>
                 </a:solidFill>
-                <a:latin typeface="Karla"/>
+                <a:latin typeface="Calibri"/>
               </a:rPr>
               <a:t>3</a:t>
             </a:r>
@@ -8222,11 +8112,11 @@
               </a:spcAft>
             </a:pPr>
             <a:r>
-              <a:rPr sz="1300" b="1" i="0">
+              <a:rPr sz="1300" b="0" i="0">
                 <a:solidFill>
                   <a:srgbClr val="34322F"/>
                 </a:solidFill>
-                <a:latin typeface="Libre Caslon Display"/>
+                <a:latin typeface="Georgia"/>
               </a:rPr>
               <a:t>The story, in four or five sentences</a:t>
             </a:r>
@@ -8269,7 +8159,7 @@
                 <a:solidFill>
                   <a:srgbClr val="56524B"/>
                 </a:solidFill>
-                <a:latin typeface="Karla"/>
+                <a:latin typeface="Calibri"/>
               </a:rPr>
               <a:t>Use at least two cards, name each one, and put in one number from your sums.</a:t>
             </a:r>
@@ -8312,7 +8202,7 @@
                 <a:solidFill>
                   <a:srgbClr val="34322F"/>
                 </a:solidFill>
-                <a:latin typeface="Karla"/>
+                <a:latin typeface="Calibri"/>
               </a:rPr>
               <a:t>Your evidence sheet has everything you need. Write it for somebody who has not seen the cards.</a:t>
             </a:r>
@@ -8380,7 +8270,7 @@
                 <a:solidFill>
                   <a:srgbClr val="8C877D"/>
                 </a:solidFill>
-                <a:latin typeface="Karla"/>
+                <a:latin typeface="Calibri"/>
               </a:rPr>
               <a:t>The Pastoral Guide</a:t>
             </a:r>
@@ -8423,7 +8313,7 @@
                 <a:solidFill>
                   <a:srgbClr val="8C877D"/>
                 </a:solidFill>
-                <a:latin typeface="Karla"/>
+                <a:latin typeface="Calibri"/>
               </a:rPr>
               <a:t>14 / 19</a:t>
             </a:r>
@@ -8528,7 +8418,7 @@
                 <a:solidFill>
                   <a:srgbClr val="34322F"/>
                 </a:solidFill>
-                <a:latin typeface="Karla"/>
+                <a:latin typeface="Calibri"/>
               </a:rPr>
               <a:t>QUESTION THE HEADLINE  ·  LESSON 5 OF 5</a:t>
             </a:r>
@@ -8537,19 +8427,147 @@
       </p:sp>
       <p:sp>
         <p:nvSpPr>
-          <p:cNvPr id="4" name="Rounded Rectangle 3"/>
+          <p:cNvPr id="5" name="TextBox 4"/>
+          <p:cNvSpPr txBox="1"/>
+          <p:nvPr/>
+        </p:nvSpPr>
+        <p:spPr>
+          <a:xfrm>
+            <a:off x="685800" y="566928"/>
+            <a:ext cx="7772400" cy="434848"/>
+          </a:xfrm>
+          <a:prstGeom prst="rect">
+            <a:avLst/>
+          </a:prstGeom>
+          <a:noFill/>
+          <a:effectLst/>
+        </p:spPr>
+        <p:txBody>
+          <a:bodyPr wrap="square" anchor="t" lIns="0" rIns="0" tIns="0" bIns="0">
+            <a:spAutoFit/>
+          </a:bodyPr>
+          <a:lstStyle/>
+          <a:p>
+            <a:pPr algn="l">
+              <a:lnSpc>
+                <a:spcPct val="105000"/>
+              </a:lnSpc>
+              <a:spcAft>
+                <a:spcPts val="0"/>
+              </a:spcAft>
+            </a:pPr>
+            <a:r>
+              <a:rPr sz="2800" b="0" i="0">
+                <a:solidFill>
+                  <a:srgbClr val="262422"/>
+                </a:solidFill>
+                <a:latin typeface="Georgia"/>
+              </a:rPr>
+              <a:t>Check somebody else’s page</a:t>
+            </a:r>
+          </a:p>
+        </p:txBody>
+      </p:sp>
+      <p:sp>
+        <p:nvSpPr>
+          <p:cNvPr id="6" name="TextBox 5"/>
+          <p:cNvSpPr txBox="1"/>
+          <p:nvPr/>
+        </p:nvSpPr>
+        <p:spPr>
+          <a:xfrm>
+            <a:off x="685800" y="1152144"/>
+            <a:ext cx="7772400" cy="274320"/>
+          </a:xfrm>
+          <a:prstGeom prst="rect">
+            <a:avLst/>
+          </a:prstGeom>
+          <a:noFill/>
+          <a:effectLst/>
+        </p:spPr>
+        <p:txBody>
+          <a:bodyPr wrap="square" anchor="t" lIns="0" rIns="0" tIns="0" bIns="0">
+            <a:spAutoFit/>
+          </a:bodyPr>
+          <a:lstStyle/>
+          <a:p>
+            <a:pPr algn="l">
+              <a:lnSpc>
+                <a:spcPct val="125000"/>
+              </a:lnSpc>
+              <a:spcAft>
+                <a:spcPts val="0"/>
+              </a:spcAft>
+            </a:pPr>
+            <a:r>
+              <a:rPr sz="1300" b="0" i="0">
+                <a:solidFill>
+                  <a:srgbClr val="56524B"/>
+                </a:solidFill>
+                <a:latin typeface="Calibri"/>
+              </a:rPr>
+              <a:t>Swap front pages with somebody from another group. Tick each box it passes.</a:t>
+            </a:r>
+          </a:p>
+        </p:txBody>
+      </p:sp>
+      <p:sp>
+        <p:nvSpPr>
+          <p:cNvPr id="7" name="Rectangle 6"/>
           <p:cNvSpPr/>
           <p:nvPr/>
         </p:nvSpPr>
         <p:spPr>
           <a:xfrm>
-            <a:off x="7714534" y="246888"/>
-            <a:ext cx="743665" cy="237744"/>
-          </a:xfrm>
-          <a:prstGeom prst="roundRect">
-            <a:avLst>
-              <a:gd name="adj" fmla="val 50000"/>
-            </a:avLst>
+            <a:off x="685800" y="1591056"/>
+            <a:ext cx="7772400" cy="676656"/>
+          </a:xfrm>
+          <a:prstGeom prst="rect">
+            <a:avLst/>
+          </a:prstGeom>
+          <a:solidFill>
+            <a:srgbClr val="FFFDF7"/>
+          </a:solidFill>
+          <a:ln>
+            <a:noFill/>
+          </a:ln>
+          <a:effectLst/>
+        </p:spPr>
+        <p:style>
+          <a:lnRef idx="1">
+            <a:schemeClr val="accent1"/>
+          </a:lnRef>
+          <a:fillRef idx="3">
+            <a:schemeClr val="accent1"/>
+          </a:fillRef>
+          <a:effectRef idx="0">
+            <a:schemeClr val="accent1"/>
+          </a:effectRef>
+          <a:fontRef idx="minor">
+            <a:schemeClr val="lt1"/>
+          </a:fontRef>
+        </p:style>
+        <p:txBody>
+          <a:bodyPr rtlCol="0" anchor="ctr"/>
+          <a:lstStyle/>
+          <a:p>
+            <a:pPr algn="ctr"/>
+          </a:p>
+        </p:txBody>
+      </p:sp>
+      <p:sp>
+        <p:nvSpPr>
+          <p:cNvPr id="8" name="Oval 7"/>
+          <p:cNvSpPr/>
+          <p:nvPr/>
+        </p:nvSpPr>
+        <p:spPr>
+          <a:xfrm>
+            <a:off x="868680" y="1728216"/>
+            <a:ext cx="402336" cy="402336"/>
+          </a:xfrm>
+          <a:prstGeom prst="ellipse">
+            <a:avLst/>
           </a:prstGeom>
           <a:solidFill>
             <a:srgbClr val="34322F"/>
@@ -8574,32 +8592,66 @@
           </a:fontRef>
         </p:style>
         <p:txBody>
-          <a:bodyPr rtlCol="0" anchor="ctr" wrap="none" lIns="0" rIns="0" tIns="0" bIns="0"/>
+          <a:bodyPr rtlCol="0" anchor="ctr"/>
           <a:lstStyle/>
           <a:p>
             <a:pPr algn="ctr"/>
-            <a:r>
-              <a:rPr sz="950" b="1" spc="90">
+          </a:p>
+        </p:txBody>
+      </p:sp>
+      <p:sp>
+        <p:nvSpPr>
+          <p:cNvPr id="9" name="TextBox 8"/>
+          <p:cNvSpPr txBox="1"/>
+          <p:nvPr/>
+        </p:nvSpPr>
+        <p:spPr>
+          <a:xfrm>
+            <a:off x="868680" y="1824228"/>
+            <a:ext cx="402336" cy="219456"/>
+          </a:xfrm>
+          <a:prstGeom prst="rect">
+            <a:avLst/>
+          </a:prstGeom>
+          <a:noFill/>
+          <a:effectLst/>
+        </p:spPr>
+        <p:txBody>
+          <a:bodyPr wrap="square" anchor="t" lIns="0" rIns="0" tIns="0" bIns="0">
+            <a:spAutoFit/>
+          </a:bodyPr>
+          <a:lstStyle/>
+          <a:p>
+            <a:pPr algn="ctr">
+              <a:lnSpc>
+                <a:spcPct val="125000"/>
+              </a:lnSpc>
+              <a:spcAft>
+                <a:spcPts val="0"/>
+              </a:spcAft>
+            </a:pPr>
+            <a:r>
+              <a:rPr sz="1150" b="1" i="0">
                 <a:solidFill>
                   <a:srgbClr val="FFFDF7"/>
                 </a:solidFill>
-                <a:latin typeface="Karla"/>
-              </a:rPr>
-              <a:t>MARK</a:t>
-            </a:r>
-          </a:p>
-        </p:txBody>
-      </p:sp>
-      <p:sp>
-        <p:nvSpPr>
-          <p:cNvPr id="5" name="TextBox 4"/>
-          <p:cNvSpPr txBox="1"/>
-          <p:nvPr/>
-        </p:nvSpPr>
-        <p:spPr>
-          <a:xfrm>
-            <a:off x="685800" y="566928"/>
-            <a:ext cx="7772400" cy="434848"/>
+                <a:latin typeface="Calibri"/>
+              </a:rPr>
+              <a:t>1</a:t>
+            </a:r>
+          </a:p>
+        </p:txBody>
+      </p:sp>
+      <p:sp>
+        <p:nvSpPr>
+          <p:cNvPr id="10" name="TextBox 9"/>
+          <p:cNvSpPr txBox="1"/>
+          <p:nvPr/>
+        </p:nvSpPr>
+        <p:spPr>
+          <a:xfrm>
+            <a:off x="1417320" y="1691640"/>
+            <a:ext cx="6821424" cy="237744"/>
           </a:xfrm>
           <a:prstGeom prst="rect">
             <a:avLst/>
@@ -8615,34 +8667,34 @@
           <a:p>
             <a:pPr algn="l">
               <a:lnSpc>
-                <a:spcPct val="105000"/>
-              </a:lnSpc>
-              <a:spcAft>
-                <a:spcPts val="0"/>
-              </a:spcAft>
-            </a:pPr>
-            <a:r>
-              <a:rPr sz="2800" b="1" i="0">
-                <a:solidFill>
-                  <a:srgbClr val="262422"/>
-                </a:solidFill>
-                <a:latin typeface="Libre Caslon Display"/>
-              </a:rPr>
-              <a:t>Check somebody else’s page</a:t>
-            </a:r>
-          </a:p>
-        </p:txBody>
-      </p:sp>
-      <p:sp>
-        <p:nvSpPr>
-          <p:cNvPr id="6" name="TextBox 5"/>
-          <p:cNvSpPr txBox="1"/>
-          <p:nvPr/>
-        </p:nvSpPr>
-        <p:spPr>
-          <a:xfrm>
-            <a:off x="685800" y="1152144"/>
-            <a:ext cx="7772400" cy="274320"/>
+                <a:spcPct val="125000"/>
+              </a:lnSpc>
+              <a:spcAft>
+                <a:spcPts val="0"/>
+              </a:spcAft>
+            </a:pPr>
+            <a:r>
+              <a:rPr sz="1300" b="0" i="0">
+                <a:solidFill>
+                  <a:srgbClr val="34322F"/>
+                </a:solidFill>
+                <a:latin typeface="Georgia"/>
+              </a:rPr>
+              <a:t>Is the headline true to the evidence?</a:t>
+            </a:r>
+          </a:p>
+        </p:txBody>
+      </p:sp>
+      <p:sp>
+        <p:nvSpPr>
+          <p:cNvPr id="11" name="TextBox 10"/>
+          <p:cNvSpPr txBox="1"/>
+          <p:nvPr/>
+        </p:nvSpPr>
+        <p:spPr>
+          <a:xfrm>
+            <a:off x="1417320" y="1938528"/>
+            <a:ext cx="6821424" cy="256031"/>
           </a:xfrm>
           <a:prstGeom prst="rect">
             <a:avLst/>
@@ -8665,26 +8717,26 @@
               </a:spcAft>
             </a:pPr>
             <a:r>
-              <a:rPr sz="1300" b="0" i="0">
+              <a:rPr sz="1100" b="0" i="0">
                 <a:solidFill>
                   <a:srgbClr val="56524B"/>
                 </a:solidFill>
-                <a:latin typeface="Karla"/>
-              </a:rPr>
-              <a:t>Swap front pages with somebody from another group. Tick each box it passes.</a:t>
-            </a:r>
-          </a:p>
-        </p:txBody>
-      </p:sp>
-      <p:sp>
-        <p:nvSpPr>
-          <p:cNvPr id="7" name="Rectangle 6"/>
+                <a:latin typeface="Calibri"/>
+              </a:rPr>
+              <a:t>Not bigger, not smaller, than what the cards show.</a:t>
+            </a:r>
+          </a:p>
+        </p:txBody>
+      </p:sp>
+      <p:sp>
+        <p:nvSpPr>
+          <p:cNvPr id="12" name="Rectangle 11"/>
           <p:cNvSpPr/>
           <p:nvPr/>
         </p:nvSpPr>
         <p:spPr>
           <a:xfrm>
-            <a:off x="685800" y="1591056"/>
+            <a:off x="685800" y="2414016"/>
             <a:ext cx="7772400" cy="676656"/>
           </a:xfrm>
           <a:prstGeom prst="rect">
@@ -8722,13 +8774,13 @@
       </p:sp>
       <p:sp>
         <p:nvSpPr>
-          <p:cNvPr id="8" name="Oval 7"/>
+          <p:cNvPr id="13" name="Oval 12"/>
           <p:cNvSpPr/>
           <p:nvPr/>
         </p:nvSpPr>
         <p:spPr>
           <a:xfrm>
-            <a:off x="868680" y="1728216"/>
+            <a:off x="868680" y="2551176"/>
             <a:ext cx="402336" cy="402336"/>
           </a:xfrm>
           <a:prstGeom prst="ellipse">
@@ -8766,13 +8818,13 @@
       </p:sp>
       <p:sp>
         <p:nvSpPr>
-          <p:cNvPr id="9" name="TextBox 8"/>
-          <p:cNvSpPr txBox="1"/>
-          <p:nvPr/>
-        </p:nvSpPr>
-        <p:spPr>
-          <a:xfrm>
-            <a:off x="868680" y="1824228"/>
+          <p:cNvPr id="14" name="TextBox 13"/>
+          <p:cNvSpPr txBox="1"/>
+          <p:nvPr/>
+        </p:nvSpPr>
+        <p:spPr>
+          <a:xfrm>
+            <a:off x="868680" y="2647188"/>
             <a:ext cx="402336" cy="219456"/>
           </a:xfrm>
           <a:prstGeom prst="rect">
@@ -8800,22 +8852,22 @@
                 <a:solidFill>
                   <a:srgbClr val="FFFDF7"/>
                 </a:solidFill>
-                <a:latin typeface="Karla"/>
-              </a:rPr>
-              <a:t>1</a:t>
-            </a:r>
-          </a:p>
-        </p:txBody>
-      </p:sp>
-      <p:sp>
-        <p:nvSpPr>
-          <p:cNvPr id="10" name="TextBox 9"/>
-          <p:cNvSpPr txBox="1"/>
-          <p:nvPr/>
-        </p:nvSpPr>
-        <p:spPr>
-          <a:xfrm>
-            <a:off x="1417320" y="1691640"/>
+                <a:latin typeface="Calibri"/>
+              </a:rPr>
+              <a:t>2</a:t>
+            </a:r>
+          </a:p>
+        </p:txBody>
+      </p:sp>
+      <p:sp>
+        <p:nvSpPr>
+          <p:cNvPr id="15" name="TextBox 14"/>
+          <p:cNvSpPr txBox="1"/>
+          <p:nvPr/>
+        </p:nvSpPr>
+        <p:spPr>
+          <a:xfrm>
+            <a:off x="1417320" y="2514600"/>
             <a:ext cx="6821424" cy="237744"/>
           </a:xfrm>
           <a:prstGeom prst="rect">
@@ -8839,26 +8891,26 @@
               </a:spcAft>
             </a:pPr>
             <a:r>
-              <a:rPr sz="1300" b="1" i="0">
+              <a:rPr sz="1300" b="0" i="0">
                 <a:solidFill>
                   <a:srgbClr val="34322F"/>
                 </a:solidFill>
-                <a:latin typeface="Libre Caslon Display"/>
-              </a:rPr>
-              <a:t>Is the headline true to the evidence?</a:t>
-            </a:r>
-          </a:p>
-        </p:txBody>
-      </p:sp>
-      <p:sp>
-        <p:nvSpPr>
-          <p:cNvPr id="11" name="TextBox 10"/>
-          <p:cNvSpPr txBox="1"/>
-          <p:nvPr/>
-        </p:nvSpPr>
-        <p:spPr>
-          <a:xfrm>
-            <a:off x="1417320" y="1938528"/>
+                <a:latin typeface="Georgia"/>
+              </a:rPr>
+              <a:t>Does it say where the evidence came from?</a:t>
+            </a:r>
+          </a:p>
+        </p:txBody>
+      </p:sp>
+      <p:sp>
+        <p:nvSpPr>
+          <p:cNvPr id="16" name="TextBox 15"/>
+          <p:cNvSpPr txBox="1"/>
+          <p:nvPr/>
+        </p:nvSpPr>
+        <p:spPr>
+          <a:xfrm>
+            <a:off x="1417320" y="2761488"/>
             <a:ext cx="6821424" cy="256031"/>
           </a:xfrm>
           <a:prstGeom prst="rect">
@@ -8886,22 +8938,22 @@
                 <a:solidFill>
                   <a:srgbClr val="56524B"/>
                 </a:solidFill>
-                <a:latin typeface="Karla"/>
-              </a:rPr>
-              <a:t>Not bigger, not smaller, than what the cards show.</a:t>
-            </a:r>
-          </a:p>
-        </p:txBody>
-      </p:sp>
-      <p:sp>
-        <p:nvSpPr>
-          <p:cNvPr id="12" name="Rectangle 11"/>
+                <a:latin typeface="Calibri"/>
+              </a:rPr>
+              <a:t>A study, a document, a person with a name.</a:t>
+            </a:r>
+          </a:p>
+        </p:txBody>
+      </p:sp>
+      <p:sp>
+        <p:nvSpPr>
+          <p:cNvPr id="17" name="Rectangle 16"/>
           <p:cNvSpPr/>
           <p:nvPr/>
         </p:nvSpPr>
         <p:spPr>
           <a:xfrm>
-            <a:off x="685800" y="2414016"/>
+            <a:off x="685800" y="3236976"/>
             <a:ext cx="7772400" cy="676656"/>
           </a:xfrm>
           <a:prstGeom prst="rect">
@@ -8939,13 +8991,13 @@
       </p:sp>
       <p:sp>
         <p:nvSpPr>
-          <p:cNvPr id="13" name="Oval 12"/>
+          <p:cNvPr id="18" name="Oval 17"/>
           <p:cNvSpPr/>
           <p:nvPr/>
         </p:nvSpPr>
         <p:spPr>
           <a:xfrm>
-            <a:off x="868680" y="2551176"/>
+            <a:off x="868680" y="3374136"/>
             <a:ext cx="402336" cy="402336"/>
           </a:xfrm>
           <a:prstGeom prst="ellipse">
@@ -8983,223 +9035,6 @@
       </p:sp>
       <p:sp>
         <p:nvSpPr>
-          <p:cNvPr id="14" name="TextBox 13"/>
-          <p:cNvSpPr txBox="1"/>
-          <p:nvPr/>
-        </p:nvSpPr>
-        <p:spPr>
-          <a:xfrm>
-            <a:off x="868680" y="2647188"/>
-            <a:ext cx="402336" cy="219456"/>
-          </a:xfrm>
-          <a:prstGeom prst="rect">
-            <a:avLst/>
-          </a:prstGeom>
-          <a:noFill/>
-          <a:effectLst/>
-        </p:spPr>
-        <p:txBody>
-          <a:bodyPr wrap="square" anchor="t" lIns="0" rIns="0" tIns="0" bIns="0">
-            <a:spAutoFit/>
-          </a:bodyPr>
-          <a:lstStyle/>
-          <a:p>
-            <a:pPr algn="ctr">
-              <a:lnSpc>
-                <a:spcPct val="125000"/>
-              </a:lnSpc>
-              <a:spcAft>
-                <a:spcPts val="0"/>
-              </a:spcAft>
-            </a:pPr>
-            <a:r>
-              <a:rPr sz="1150" b="1" i="0">
-                <a:solidFill>
-                  <a:srgbClr val="FFFDF7"/>
-                </a:solidFill>
-                <a:latin typeface="Karla"/>
-              </a:rPr>
-              <a:t>2</a:t>
-            </a:r>
-          </a:p>
-        </p:txBody>
-      </p:sp>
-      <p:sp>
-        <p:nvSpPr>
-          <p:cNvPr id="15" name="TextBox 14"/>
-          <p:cNvSpPr txBox="1"/>
-          <p:nvPr/>
-        </p:nvSpPr>
-        <p:spPr>
-          <a:xfrm>
-            <a:off x="1417320" y="2514600"/>
-            <a:ext cx="6821424" cy="237744"/>
-          </a:xfrm>
-          <a:prstGeom prst="rect">
-            <a:avLst/>
-          </a:prstGeom>
-          <a:noFill/>
-          <a:effectLst/>
-        </p:spPr>
-        <p:txBody>
-          <a:bodyPr wrap="square" anchor="t" lIns="0" rIns="0" tIns="0" bIns="0">
-            <a:spAutoFit/>
-          </a:bodyPr>
-          <a:lstStyle/>
-          <a:p>
-            <a:pPr algn="l">
-              <a:lnSpc>
-                <a:spcPct val="125000"/>
-              </a:lnSpc>
-              <a:spcAft>
-                <a:spcPts val="0"/>
-              </a:spcAft>
-            </a:pPr>
-            <a:r>
-              <a:rPr sz="1300" b="1" i="0">
-                <a:solidFill>
-                  <a:srgbClr val="34322F"/>
-                </a:solidFill>
-                <a:latin typeface="Libre Caslon Display"/>
-              </a:rPr>
-              <a:t>Does it say where the evidence came from?</a:t>
-            </a:r>
-          </a:p>
-        </p:txBody>
-      </p:sp>
-      <p:sp>
-        <p:nvSpPr>
-          <p:cNvPr id="16" name="TextBox 15"/>
-          <p:cNvSpPr txBox="1"/>
-          <p:nvPr/>
-        </p:nvSpPr>
-        <p:spPr>
-          <a:xfrm>
-            <a:off x="1417320" y="2761488"/>
-            <a:ext cx="6821424" cy="256031"/>
-          </a:xfrm>
-          <a:prstGeom prst="rect">
-            <a:avLst/>
-          </a:prstGeom>
-          <a:noFill/>
-          <a:effectLst/>
-        </p:spPr>
-        <p:txBody>
-          <a:bodyPr wrap="square" anchor="t" lIns="0" rIns="0" tIns="0" bIns="0">
-            <a:spAutoFit/>
-          </a:bodyPr>
-          <a:lstStyle/>
-          <a:p>
-            <a:pPr algn="l">
-              <a:lnSpc>
-                <a:spcPct val="125000"/>
-              </a:lnSpc>
-              <a:spcAft>
-                <a:spcPts val="0"/>
-              </a:spcAft>
-            </a:pPr>
-            <a:r>
-              <a:rPr sz="1100" b="0" i="0">
-                <a:solidFill>
-                  <a:srgbClr val="56524B"/>
-                </a:solidFill>
-                <a:latin typeface="Karla"/>
-              </a:rPr>
-              <a:t>A study, a document, a person with a name.</a:t>
-            </a:r>
-          </a:p>
-        </p:txBody>
-      </p:sp>
-      <p:sp>
-        <p:nvSpPr>
-          <p:cNvPr id="17" name="Rectangle 16"/>
-          <p:cNvSpPr/>
-          <p:nvPr/>
-        </p:nvSpPr>
-        <p:spPr>
-          <a:xfrm>
-            <a:off x="685800" y="3236976"/>
-            <a:ext cx="7772400" cy="676656"/>
-          </a:xfrm>
-          <a:prstGeom prst="rect">
-            <a:avLst/>
-          </a:prstGeom>
-          <a:solidFill>
-            <a:srgbClr val="FFFDF7"/>
-          </a:solidFill>
-          <a:ln>
-            <a:noFill/>
-          </a:ln>
-          <a:effectLst/>
-        </p:spPr>
-        <p:style>
-          <a:lnRef idx="1">
-            <a:schemeClr val="accent1"/>
-          </a:lnRef>
-          <a:fillRef idx="3">
-            <a:schemeClr val="accent1"/>
-          </a:fillRef>
-          <a:effectRef idx="0">
-            <a:schemeClr val="accent1"/>
-          </a:effectRef>
-          <a:fontRef idx="minor">
-            <a:schemeClr val="lt1"/>
-          </a:fontRef>
-        </p:style>
-        <p:txBody>
-          <a:bodyPr rtlCol="0" anchor="ctr"/>
-          <a:lstStyle/>
-          <a:p>
-            <a:pPr algn="ctr"/>
-          </a:p>
-        </p:txBody>
-      </p:sp>
-      <p:sp>
-        <p:nvSpPr>
-          <p:cNvPr id="18" name="Oval 17"/>
-          <p:cNvSpPr/>
-          <p:nvPr/>
-        </p:nvSpPr>
-        <p:spPr>
-          <a:xfrm>
-            <a:off x="868680" y="3374136"/>
-            <a:ext cx="402336" cy="402336"/>
-          </a:xfrm>
-          <a:prstGeom prst="ellipse">
-            <a:avLst/>
-          </a:prstGeom>
-          <a:solidFill>
-            <a:srgbClr val="34322F"/>
-          </a:solidFill>
-          <a:ln>
-            <a:noFill/>
-          </a:ln>
-          <a:effectLst/>
-        </p:spPr>
-        <p:style>
-          <a:lnRef idx="1">
-            <a:schemeClr val="accent1"/>
-          </a:lnRef>
-          <a:fillRef idx="3">
-            <a:schemeClr val="accent1"/>
-          </a:fillRef>
-          <a:effectRef idx="0">
-            <a:schemeClr val="accent1"/>
-          </a:effectRef>
-          <a:fontRef idx="minor">
-            <a:schemeClr val="lt1"/>
-          </a:fontRef>
-        </p:style>
-        <p:txBody>
-          <a:bodyPr rtlCol="0" anchor="ctr"/>
-          <a:lstStyle/>
-          <a:p>
-            <a:pPr algn="ctr"/>
-          </a:p>
-        </p:txBody>
-      </p:sp>
-      <p:sp>
-        <p:nvSpPr>
           <p:cNvPr id="19" name="TextBox 18"/>
           <p:cNvSpPr txBox="1"/>
           <p:nvPr/>
@@ -9234,7 +9069,7 @@
                 <a:solidFill>
                   <a:srgbClr val="FFFDF7"/>
                 </a:solidFill>
-                <a:latin typeface="Karla"/>
+                <a:latin typeface="Calibri"/>
               </a:rPr>
               <a:t>3</a:t>
             </a:r>
@@ -9273,11 +9108,11 @@
               </a:spcAft>
             </a:pPr>
             <a:r>
-              <a:rPr sz="1300" b="1" i="0">
+              <a:rPr sz="1300" b="0" i="0">
                 <a:solidFill>
                   <a:srgbClr val="34322F"/>
                 </a:solidFill>
-                <a:latin typeface="Libre Caslon Display"/>
+                <a:latin typeface="Georgia"/>
               </a:rPr>
               <a:t>Would it survive the five questions?</a:t>
             </a:r>
@@ -9320,7 +9155,7 @@
                 <a:solidFill>
                   <a:srgbClr val="56524B"/>
                 </a:solidFill>
-                <a:latin typeface="Karla"/>
+                <a:latin typeface="Calibri"/>
               </a:rPr>
               <a:t>Try one or two of them on it.</a:t>
             </a:r>
@@ -9363,7 +9198,7 @@
                 <a:solidFill>
                   <a:srgbClr val="34322F"/>
                 </a:solidFill>
-                <a:latin typeface="Karla"/>
+                <a:latin typeface="Calibri"/>
               </a:rPr>
               <a:t>Write one change that would make it better, then hand it back.</a:t>
             </a:r>
@@ -9431,7 +9266,7 @@
                 <a:solidFill>
                   <a:srgbClr val="8C877D"/>
                 </a:solidFill>
-                <a:latin typeface="Karla"/>
+                <a:latin typeface="Calibri"/>
               </a:rPr>
               <a:t>The Pastoral Guide</a:t>
             </a:r>
@@ -9474,7 +9309,7 @@
                 <a:solidFill>
                   <a:srgbClr val="8C877D"/>
                 </a:solidFill>
-                <a:latin typeface="Karla"/>
+                <a:latin typeface="Calibri"/>
               </a:rPr>
               <a:t>15 / 19</a:t>
             </a:r>
@@ -9579,7 +9414,7 @@
                 <a:solidFill>
                   <a:srgbClr val="34322F"/>
                 </a:solidFill>
-                <a:latin typeface="Karla"/>
+                <a:latin typeface="Calibri"/>
               </a:rPr>
               <a:t>QUESTION THE HEADLINE  ·  LESSON 5 OF 5</a:t>
             </a:r>
@@ -9618,11 +9453,11 @@
               </a:spcAft>
             </a:pPr>
             <a:r>
-              <a:rPr sz="2800" b="1" i="0">
+              <a:rPr sz="2800" b="0" i="0">
                 <a:solidFill>
                   <a:srgbClr val="262422"/>
                 </a:solidFill>
-                <a:latin typeface="Libre Caslon Display"/>
+                <a:latin typeface="Georgia"/>
               </a:rPr>
               <a:t>What really happened</a:t>
             </a:r>
@@ -9723,7 +9558,7 @@
                 <a:solidFill>
                   <a:srgbClr val="34322F"/>
                 </a:solidFill>
-                <a:latin typeface="Karla"/>
+                <a:latin typeface="Calibri"/>
               </a:rPr>
               <a:t>BUSTED</a:t>
             </a:r>
@@ -9762,11 +9597,11 @@
               </a:spcAft>
             </a:pPr>
             <a:r>
-              <a:rPr sz="1500" b="1" i="0">
+              <a:rPr sz="1500" b="0" i="0">
                 <a:solidFill>
                   <a:srgbClr val="34322F"/>
                 </a:solidFill>
-                <a:latin typeface="Libre Caslon Display"/>
+                <a:latin typeface="Georgia"/>
               </a:rPr>
               <a:t>1911</a:t>
             </a:r>
@@ -9853,7 +9688,7 @@
                 <a:solidFill>
                   <a:srgbClr val="262422"/>
                 </a:solidFill>
-                <a:latin typeface="Karla"/>
+                <a:latin typeface="Calibri"/>
               </a:rPr>
               <a:t>Crisco goes on sale, sold as healthier than butter and lard.</a:t>
             </a:r>
@@ -9892,11 +9727,11 @@
               </a:spcAft>
             </a:pPr>
             <a:r>
-              <a:rPr sz="1500" b="1" i="0">
+              <a:rPr sz="1500" b="0" i="0">
                 <a:solidFill>
                   <a:srgbClr val="34322F"/>
                 </a:solidFill>
-                <a:latin typeface="Libre Caslon Display"/>
+                <a:latin typeface="Georgia"/>
               </a:rPr>
               <a:t>1990</a:t>
             </a:r>
@@ -9983,7 +9818,7 @@
                 <a:solidFill>
                   <a:srgbClr val="262422"/>
                 </a:solidFill>
-                <a:latin typeface="Karla"/>
+                <a:latin typeface="Calibri"/>
               </a:rPr>
               <a:t>An experiment shows trans fat lowers the good cholesterol.</a:t>
             </a:r>
@@ -10022,11 +9857,11 @@
               </a:spcAft>
             </a:pPr>
             <a:r>
-              <a:rPr sz="1500" b="1" i="0">
+              <a:rPr sz="1500" b="0" i="0">
                 <a:solidFill>
                   <a:srgbClr val="34322F"/>
                 </a:solidFill>
-                <a:latin typeface="Libre Caslon Display"/>
+                <a:latin typeface="Georgia"/>
               </a:rPr>
               <a:t>2007</a:t>
             </a:r>
@@ -10113,7 +9948,7 @@
                 <a:solidFill>
                   <a:srgbClr val="262422"/>
                 </a:solidFill>
-                <a:latin typeface="Karla"/>
+                <a:latin typeface="Calibri"/>
               </a:rPr>
               <a:t>Crisco changes its recipe.</a:t>
             </a:r>
@@ -10152,11 +9987,11 @@
               </a:spcAft>
             </a:pPr>
             <a:r>
-              <a:rPr sz="1500" b="1" i="0">
+              <a:rPr sz="1500" b="0" i="0">
                 <a:solidFill>
                   <a:srgbClr val="34322F"/>
                 </a:solidFill>
-                <a:latin typeface="Libre Caslon Display"/>
+                <a:latin typeface="Georgia"/>
               </a:rPr>
               <a:t>2015</a:t>
             </a:r>
@@ -10243,7 +10078,7 @@
                 <a:solidFill>
                   <a:srgbClr val="262422"/>
                 </a:solidFill>
-                <a:latin typeface="Karla"/>
+                <a:latin typeface="Calibri"/>
               </a:rPr>
               <a:t>The US rules factory trans fats unsafe.</a:t>
             </a:r>
@@ -10330,7 +10165,7 @@
                 <a:solidFill>
                   <a:srgbClr val="D7D2C8"/>
                 </a:solidFill>
-                <a:latin typeface="Karla"/>
+                <a:latin typeface="Calibri"/>
               </a:rPr>
               <a:t>THE QUESTION THAT WOULD HAVE CAUGHT IT</a:t>
             </a:r>
@@ -10369,11 +10204,11 @@
               </a:spcAft>
             </a:pPr>
             <a:r>
-              <a:rPr sz="1800" b="1" i="0">
+              <a:rPr sz="1800" b="0" i="0">
                 <a:solidFill>
                   <a:srgbClr val="FFFDF7"/>
                 </a:solidFill>
-                <a:latin typeface="Libre Caslon Display"/>
+                <a:latin typeface="Georgia"/>
               </a:rPr>
               <a:t>Who gains if I believe it?</a:t>
             </a:r>
@@ -10441,7 +10276,7 @@
                 <a:solidFill>
                   <a:srgbClr val="8C877D"/>
                 </a:solidFill>
-                <a:latin typeface="Karla"/>
+                <a:latin typeface="Calibri"/>
               </a:rPr>
               <a:t>The Pastoral Guide</a:t>
             </a:r>
@@ -10484,7 +10319,7 @@
                 <a:solidFill>
                   <a:srgbClr val="8C877D"/>
                 </a:solidFill>
-                <a:latin typeface="Karla"/>
+                <a:latin typeface="Calibri"/>
               </a:rPr>
               <a:t>16 / 19</a:t>
             </a:r>
@@ -10589,64 +10424,9 @@
                 <a:solidFill>
                   <a:srgbClr val="34322F"/>
                 </a:solidFill>
-                <a:latin typeface="Karla"/>
+                <a:latin typeface="Calibri"/>
               </a:rPr>
               <a:t>QUESTION THE HEADLINE  ·  LESSON 5 OF 5</a:t>
-            </a:r>
-          </a:p>
-        </p:txBody>
-      </p:sp>
-      <p:sp>
-        <p:nvSpPr>
-          <p:cNvPr id="4" name="Rounded Rectangle 3"/>
-          <p:cNvSpPr/>
-          <p:nvPr/>
-        </p:nvSpPr>
-        <p:spPr>
-          <a:xfrm>
-            <a:off x="7640472" y="246888"/>
-            <a:ext cx="817727" cy="237744"/>
-          </a:xfrm>
-          <a:prstGeom prst="roundRect">
-            <a:avLst>
-              <a:gd name="adj" fmla="val 50000"/>
-            </a:avLst>
-          </a:prstGeom>
-          <a:solidFill>
-            <a:srgbClr val="34322F"/>
-          </a:solidFill>
-          <a:ln>
-            <a:noFill/>
-          </a:ln>
-          <a:effectLst/>
-        </p:spPr>
-        <p:style>
-          <a:lnRef idx="1">
-            <a:schemeClr val="accent1"/>
-          </a:lnRef>
-          <a:fillRef idx="3">
-            <a:schemeClr val="accent1"/>
-          </a:fillRef>
-          <a:effectRef idx="0">
-            <a:schemeClr val="accent1"/>
-          </a:effectRef>
-          <a:fontRef idx="minor">
-            <a:schemeClr val="lt1"/>
-          </a:fontRef>
-        </p:style>
-        <p:txBody>
-          <a:bodyPr rtlCol="0" anchor="ctr" wrap="none" lIns="0" rIns="0" tIns="0" bIns="0"/>
-          <a:lstStyle/>
-          <a:p>
-            <a:pPr algn="ctr"/>
-            <a:r>
-              <a:rPr sz="950" b="1" spc="90">
-                <a:solidFill>
-                  <a:srgbClr val="FFFDF7"/>
-                </a:solidFill>
-                <a:latin typeface="Karla"/>
-              </a:rPr>
-              <a:t>ARGUE</a:t>
             </a:r>
           </a:p>
         </p:txBody>
@@ -10687,7 +10467,7 @@
                 <a:solidFill>
                   <a:srgbClr val="56524B"/>
                 </a:solidFill>
-                <a:latin typeface="Karla"/>
+                <a:latin typeface="Calibri"/>
               </a:rPr>
               <a:t>NO RIGHT ANSWER</a:t>
             </a:r>
@@ -10820,11 +10600,11 @@
               </a:spcAft>
             </a:pPr>
             <a:r>
-              <a:rPr sz="2200" b="1" i="0">
+              <a:rPr sz="2200" b="0" i="0">
                 <a:solidFill>
                   <a:srgbClr val="262422"/>
                 </a:solidFill>
-                <a:latin typeface="Libre Caslon Display"/>
+                <a:latin typeface="Georgia"/>
               </a:rPr>
               <a:t>Should a company be allowed to say its food is healthier than another food? Who should have to check first?</a:t>
             </a:r>
@@ -10867,7 +10647,7 @@
                 <a:solidFill>
                   <a:srgbClr val="34322F"/>
                 </a:solidFill>
-                <a:latin typeface="Karla"/>
+                <a:latin typeface="Calibri"/>
               </a:rPr>
               <a:t>Two minutes with the person next to you, then we hear from a few.</a:t>
             </a:r>
@@ -10935,7 +10715,7 @@
                 <a:solidFill>
                   <a:srgbClr val="8C877D"/>
                 </a:solidFill>
-                <a:latin typeface="Karla"/>
+                <a:latin typeface="Calibri"/>
               </a:rPr>
               <a:t>The Pastoral Guide</a:t>
             </a:r>
@@ -10978,7 +10758,7 @@
                 <a:solidFill>
                   <a:srgbClr val="8C877D"/>
                 </a:solidFill>
-                <a:latin typeface="Karla"/>
+                <a:latin typeface="Calibri"/>
               </a:rPr>
               <a:t>17 / 19</a:t>
             </a:r>
@@ -11083,7 +10863,7 @@
                 <a:solidFill>
                   <a:srgbClr val="34322F"/>
                 </a:solidFill>
-                <a:latin typeface="Karla"/>
+                <a:latin typeface="Calibri"/>
               </a:rPr>
               <a:t>QUESTION THE HEADLINE  ·  LESSON 5 OF 5</a:t>
             </a:r>
@@ -11092,19 +10872,104 @@
       </p:sp>
       <p:sp>
         <p:nvSpPr>
-          <p:cNvPr id="4" name="Rounded Rectangle 3"/>
+          <p:cNvPr id="5" name="TextBox 4"/>
+          <p:cNvSpPr txBox="1"/>
+          <p:nvPr/>
+        </p:nvSpPr>
+        <p:spPr>
+          <a:xfrm>
+            <a:off x="685800" y="566928"/>
+            <a:ext cx="7772400" cy="434848"/>
+          </a:xfrm>
+          <a:prstGeom prst="rect">
+            <a:avLst/>
+          </a:prstGeom>
+          <a:noFill/>
+          <a:effectLst/>
+        </p:spPr>
+        <p:txBody>
+          <a:bodyPr wrap="square" anchor="t" lIns="0" rIns="0" tIns="0" bIns="0">
+            <a:spAutoFit/>
+          </a:bodyPr>
+          <a:lstStyle/>
+          <a:p>
+            <a:pPr algn="l">
+              <a:lnSpc>
+                <a:spcPct val="105000"/>
+              </a:lnSpc>
+              <a:spcAft>
+                <a:spcPts val="0"/>
+              </a:spcAft>
+            </a:pPr>
+            <a:r>
+              <a:rPr sz="2800" b="0" i="0">
+                <a:solidFill>
+                  <a:srgbClr val="262422"/>
+                </a:solidFill>
+                <a:latin typeface="Georgia"/>
+              </a:rPr>
+              <a:t>Two questions, just for you</a:t>
+            </a:r>
+          </a:p>
+        </p:txBody>
+      </p:sp>
+      <p:sp>
+        <p:nvSpPr>
+          <p:cNvPr id="6" name="Rectangle 5"/>
           <p:cNvSpPr/>
           <p:nvPr/>
         </p:nvSpPr>
         <p:spPr>
           <a:xfrm>
-            <a:off x="7486248" y="246888"/>
-            <a:ext cx="971951" cy="237744"/>
-          </a:xfrm>
-          <a:prstGeom prst="roundRect">
-            <a:avLst>
-              <a:gd name="adj" fmla="val 50000"/>
-            </a:avLst>
+            <a:off x="685800" y="1371600"/>
+            <a:ext cx="7772400" cy="946403"/>
+          </a:xfrm>
+          <a:prstGeom prst="rect">
+            <a:avLst/>
+          </a:prstGeom>
+          <a:solidFill>
+            <a:srgbClr val="FFFFFF"/>
+          </a:solidFill>
+          <a:ln>
+            <a:noFill/>
+          </a:ln>
+          <a:effectLst/>
+        </p:spPr>
+        <p:style>
+          <a:lnRef idx="1">
+            <a:schemeClr val="accent1"/>
+          </a:lnRef>
+          <a:fillRef idx="3">
+            <a:schemeClr val="accent1"/>
+          </a:fillRef>
+          <a:effectRef idx="0">
+            <a:schemeClr val="accent1"/>
+          </a:effectRef>
+          <a:fontRef idx="minor">
+            <a:schemeClr val="lt1"/>
+          </a:fontRef>
+        </p:style>
+        <p:txBody>
+          <a:bodyPr rtlCol="0" anchor="ctr"/>
+          <a:lstStyle/>
+          <a:p>
+            <a:pPr algn="ctr"/>
+          </a:p>
+        </p:txBody>
+      </p:sp>
+      <p:sp>
+        <p:nvSpPr>
+          <p:cNvPr id="7" name="Rectangle 6"/>
+          <p:cNvSpPr/>
+          <p:nvPr/>
+        </p:nvSpPr>
+        <p:spPr>
+          <a:xfrm>
+            <a:off x="685800" y="1371600"/>
+            <a:ext cx="45720" cy="946403"/>
+          </a:xfrm>
+          <a:prstGeom prst="rect">
+            <a:avLst/>
           </a:prstGeom>
           <a:solidFill>
             <a:srgbClr val="34322F"/>
@@ -11129,32 +10994,110 @@
           </a:fontRef>
         </p:style>
         <p:txBody>
-          <a:bodyPr rtlCol="0" anchor="ctr" wrap="none" lIns="0" rIns="0" tIns="0" bIns="0"/>
+          <a:bodyPr rtlCol="0" anchor="ctr"/>
           <a:lstStyle/>
           <a:p>
             <a:pPr algn="ctr"/>
-            <a:r>
-              <a:rPr sz="950" b="1" spc="90">
+          </a:p>
+        </p:txBody>
+      </p:sp>
+      <p:sp>
+        <p:nvSpPr>
+          <p:cNvPr id="8" name="Oval 7"/>
+          <p:cNvSpPr/>
+          <p:nvPr/>
+        </p:nvSpPr>
+        <p:spPr>
+          <a:xfrm>
+            <a:off x="896112" y="1643634"/>
+            <a:ext cx="402336" cy="402336"/>
+          </a:xfrm>
+          <a:prstGeom prst="ellipse">
+            <a:avLst/>
+          </a:prstGeom>
+          <a:solidFill>
+            <a:srgbClr val="34322F"/>
+          </a:solidFill>
+          <a:ln>
+            <a:noFill/>
+          </a:ln>
+          <a:effectLst/>
+        </p:spPr>
+        <p:style>
+          <a:lnRef idx="1">
+            <a:schemeClr val="accent1"/>
+          </a:lnRef>
+          <a:fillRef idx="3">
+            <a:schemeClr val="accent1"/>
+          </a:fillRef>
+          <a:effectRef idx="0">
+            <a:schemeClr val="accent1"/>
+          </a:effectRef>
+          <a:fontRef idx="minor">
+            <a:schemeClr val="lt1"/>
+          </a:fontRef>
+        </p:style>
+        <p:txBody>
+          <a:bodyPr rtlCol="0" anchor="ctr"/>
+          <a:lstStyle/>
+          <a:p>
+            <a:pPr algn="ctr"/>
+          </a:p>
+        </p:txBody>
+      </p:sp>
+      <p:sp>
+        <p:nvSpPr>
+          <p:cNvPr id="9" name="TextBox 8"/>
+          <p:cNvSpPr txBox="1"/>
+          <p:nvPr/>
+        </p:nvSpPr>
+        <p:spPr>
+          <a:xfrm>
+            <a:off x="896112" y="1735074"/>
+            <a:ext cx="402336" cy="219456"/>
+          </a:xfrm>
+          <a:prstGeom prst="rect">
+            <a:avLst/>
+          </a:prstGeom>
+          <a:noFill/>
+          <a:effectLst/>
+        </p:spPr>
+        <p:txBody>
+          <a:bodyPr wrap="square" anchor="t" lIns="0" rIns="0" tIns="0" bIns="0">
+            <a:spAutoFit/>
+          </a:bodyPr>
+          <a:lstStyle/>
+          <a:p>
+            <a:pPr algn="ctr">
+              <a:lnSpc>
+                <a:spcPct val="125000"/>
+              </a:lnSpc>
+              <a:spcAft>
+                <a:spcPts val="0"/>
+              </a:spcAft>
+            </a:pPr>
+            <a:r>
+              <a:rPr sz="1200" b="1" i="0">
                 <a:solidFill>
                   <a:srgbClr val="FFFDF7"/>
                 </a:solidFill>
-                <a:latin typeface="Karla"/>
-              </a:rPr>
-              <a:t>FOR YOU</a:t>
-            </a:r>
-          </a:p>
-        </p:txBody>
-      </p:sp>
-      <p:sp>
-        <p:nvSpPr>
-          <p:cNvPr id="5" name="TextBox 4"/>
-          <p:cNvSpPr txBox="1"/>
-          <p:nvPr/>
-        </p:nvSpPr>
-        <p:spPr>
-          <a:xfrm>
-            <a:off x="685800" y="566928"/>
-            <a:ext cx="7772400" cy="434848"/>
+                <a:latin typeface="Calibri"/>
+              </a:rPr>
+              <a:t>1</a:t>
+            </a:r>
+          </a:p>
+        </p:txBody>
+      </p:sp>
+      <p:sp>
+        <p:nvSpPr>
+          <p:cNvPr id="10" name="TextBox 9"/>
+          <p:cNvSpPr txBox="1"/>
+          <p:nvPr/>
+        </p:nvSpPr>
+        <p:spPr>
+          <a:xfrm>
+            <a:off x="1554480" y="1572768"/>
+            <a:ext cx="6675120" cy="544068"/>
           </a:xfrm>
           <a:prstGeom prst="rect">
             <a:avLst/>
@@ -11170,33 +11113,33 @@
           <a:p>
             <a:pPr algn="l">
               <a:lnSpc>
-                <a:spcPct val="105000"/>
-              </a:lnSpc>
-              <a:spcAft>
-                <a:spcPts val="0"/>
-              </a:spcAft>
-            </a:pPr>
-            <a:r>
-              <a:rPr sz="2800" b="1" i="0">
+                <a:spcPct val="115000"/>
+              </a:lnSpc>
+              <a:spcAft>
+                <a:spcPts val="0"/>
+              </a:spcAft>
+            </a:pPr>
+            <a:r>
+              <a:rPr sz="1700" b="0" i="0">
                 <a:solidFill>
                   <a:srgbClr val="262422"/>
                 </a:solidFill>
-                <a:latin typeface="Libre Caslon Display"/>
-              </a:rPr>
-              <a:t>Two questions, just for you</a:t>
-            </a:r>
-          </a:p>
-        </p:txBody>
-      </p:sp>
-      <p:sp>
-        <p:nvSpPr>
-          <p:cNvPr id="6" name="Rectangle 5"/>
+                <a:latin typeface="Georgia"/>
+              </a:rPr>
+              <a:t>Where did you move on the line, and which card moved you?</a:t>
+            </a:r>
+          </a:p>
+        </p:txBody>
+      </p:sp>
+      <p:sp>
+        <p:nvSpPr>
+          <p:cNvPr id="11" name="Rectangle 10"/>
           <p:cNvSpPr/>
           <p:nvPr/>
         </p:nvSpPr>
         <p:spPr>
           <a:xfrm>
-            <a:off x="685800" y="1371600"/>
+            <a:off x="685800" y="2537460"/>
             <a:ext cx="7772400" cy="946403"/>
           </a:xfrm>
           <a:prstGeom prst="rect">
@@ -11234,13 +11177,13 @@
       </p:sp>
       <p:sp>
         <p:nvSpPr>
-          <p:cNvPr id="7" name="Rectangle 6"/>
+          <p:cNvPr id="12" name="Rectangle 11"/>
           <p:cNvSpPr/>
           <p:nvPr/>
         </p:nvSpPr>
         <p:spPr>
           <a:xfrm>
-            <a:off x="685800" y="1371600"/>
+            <a:off x="685800" y="2537460"/>
             <a:ext cx="45720" cy="946403"/>
           </a:xfrm>
           <a:prstGeom prst="rect">
@@ -11278,13 +11221,13 @@
       </p:sp>
       <p:sp>
         <p:nvSpPr>
-          <p:cNvPr id="8" name="Oval 7"/>
+          <p:cNvPr id="13" name="Oval 12"/>
           <p:cNvSpPr/>
           <p:nvPr/>
         </p:nvSpPr>
         <p:spPr>
           <a:xfrm>
-            <a:off x="896112" y="1643634"/>
+            <a:off x="896112" y="2809494"/>
             <a:ext cx="402336" cy="402336"/>
           </a:xfrm>
           <a:prstGeom prst="ellipse">
@@ -11322,224 +11265,6 @@
       </p:sp>
       <p:sp>
         <p:nvSpPr>
-          <p:cNvPr id="9" name="TextBox 8"/>
-          <p:cNvSpPr txBox="1"/>
-          <p:nvPr/>
-        </p:nvSpPr>
-        <p:spPr>
-          <a:xfrm>
-            <a:off x="896112" y="1735074"/>
-            <a:ext cx="402336" cy="219456"/>
-          </a:xfrm>
-          <a:prstGeom prst="rect">
-            <a:avLst/>
-          </a:prstGeom>
-          <a:noFill/>
-          <a:effectLst/>
-        </p:spPr>
-        <p:txBody>
-          <a:bodyPr wrap="square" anchor="t" lIns="0" rIns="0" tIns="0" bIns="0">
-            <a:spAutoFit/>
-          </a:bodyPr>
-          <a:lstStyle/>
-          <a:p>
-            <a:pPr algn="ctr">
-              <a:lnSpc>
-                <a:spcPct val="125000"/>
-              </a:lnSpc>
-              <a:spcAft>
-                <a:spcPts val="0"/>
-              </a:spcAft>
-            </a:pPr>
-            <a:r>
-              <a:rPr sz="1200" b="1" i="0">
-                <a:solidFill>
-                  <a:srgbClr val="FFFDF7"/>
-                </a:solidFill>
-                <a:latin typeface="Karla"/>
-              </a:rPr>
-              <a:t>1</a:t>
-            </a:r>
-          </a:p>
-        </p:txBody>
-      </p:sp>
-      <p:sp>
-        <p:nvSpPr>
-          <p:cNvPr id="10" name="TextBox 9"/>
-          <p:cNvSpPr txBox="1"/>
-          <p:nvPr/>
-        </p:nvSpPr>
-        <p:spPr>
-          <a:xfrm>
-            <a:off x="1554480" y="1572768"/>
-            <a:ext cx="6675120" cy="544068"/>
-          </a:xfrm>
-          <a:prstGeom prst="rect">
-            <a:avLst/>
-          </a:prstGeom>
-          <a:noFill/>
-          <a:effectLst/>
-        </p:spPr>
-        <p:txBody>
-          <a:bodyPr wrap="square" anchor="t" lIns="0" rIns="0" tIns="0" bIns="0">
-            <a:spAutoFit/>
-          </a:bodyPr>
-          <a:lstStyle/>
-          <a:p>
-            <a:pPr algn="l">
-              <a:lnSpc>
-                <a:spcPct val="115000"/>
-              </a:lnSpc>
-              <a:spcAft>
-                <a:spcPts val="0"/>
-              </a:spcAft>
-            </a:pPr>
-            <a:r>
-              <a:rPr sz="1700" b="1" i="0">
-                <a:solidFill>
-                  <a:srgbClr val="262422"/>
-                </a:solidFill>
-                <a:latin typeface="Libre Caslon Display"/>
-              </a:rPr>
-              <a:t>Where did you move on the line, and which card moved you?</a:t>
-            </a:r>
-          </a:p>
-        </p:txBody>
-      </p:sp>
-      <p:sp>
-        <p:nvSpPr>
-          <p:cNvPr id="11" name="Rectangle 10"/>
-          <p:cNvSpPr/>
-          <p:nvPr/>
-        </p:nvSpPr>
-        <p:spPr>
-          <a:xfrm>
-            <a:off x="685800" y="2537460"/>
-            <a:ext cx="7772400" cy="946403"/>
-          </a:xfrm>
-          <a:prstGeom prst="rect">
-            <a:avLst/>
-          </a:prstGeom>
-          <a:solidFill>
-            <a:srgbClr val="FFFFFF"/>
-          </a:solidFill>
-          <a:ln>
-            <a:noFill/>
-          </a:ln>
-          <a:effectLst/>
-        </p:spPr>
-        <p:style>
-          <a:lnRef idx="1">
-            <a:schemeClr val="accent1"/>
-          </a:lnRef>
-          <a:fillRef idx="3">
-            <a:schemeClr val="accent1"/>
-          </a:fillRef>
-          <a:effectRef idx="0">
-            <a:schemeClr val="accent1"/>
-          </a:effectRef>
-          <a:fontRef idx="minor">
-            <a:schemeClr val="lt1"/>
-          </a:fontRef>
-        </p:style>
-        <p:txBody>
-          <a:bodyPr rtlCol="0" anchor="ctr"/>
-          <a:lstStyle/>
-          <a:p>
-            <a:pPr algn="ctr"/>
-          </a:p>
-        </p:txBody>
-      </p:sp>
-      <p:sp>
-        <p:nvSpPr>
-          <p:cNvPr id="12" name="Rectangle 11"/>
-          <p:cNvSpPr/>
-          <p:nvPr/>
-        </p:nvSpPr>
-        <p:spPr>
-          <a:xfrm>
-            <a:off x="685800" y="2537460"/>
-            <a:ext cx="45720" cy="946403"/>
-          </a:xfrm>
-          <a:prstGeom prst="rect">
-            <a:avLst/>
-          </a:prstGeom>
-          <a:solidFill>
-            <a:srgbClr val="34322F"/>
-          </a:solidFill>
-          <a:ln>
-            <a:noFill/>
-          </a:ln>
-          <a:effectLst/>
-        </p:spPr>
-        <p:style>
-          <a:lnRef idx="1">
-            <a:schemeClr val="accent1"/>
-          </a:lnRef>
-          <a:fillRef idx="3">
-            <a:schemeClr val="accent1"/>
-          </a:fillRef>
-          <a:effectRef idx="0">
-            <a:schemeClr val="accent1"/>
-          </a:effectRef>
-          <a:fontRef idx="minor">
-            <a:schemeClr val="lt1"/>
-          </a:fontRef>
-        </p:style>
-        <p:txBody>
-          <a:bodyPr rtlCol="0" anchor="ctr"/>
-          <a:lstStyle/>
-          <a:p>
-            <a:pPr algn="ctr"/>
-          </a:p>
-        </p:txBody>
-      </p:sp>
-      <p:sp>
-        <p:nvSpPr>
-          <p:cNvPr id="13" name="Oval 12"/>
-          <p:cNvSpPr/>
-          <p:nvPr/>
-        </p:nvSpPr>
-        <p:spPr>
-          <a:xfrm>
-            <a:off x="896112" y="2809494"/>
-            <a:ext cx="402336" cy="402336"/>
-          </a:xfrm>
-          <a:prstGeom prst="ellipse">
-            <a:avLst/>
-          </a:prstGeom>
-          <a:solidFill>
-            <a:srgbClr val="34322F"/>
-          </a:solidFill>
-          <a:ln>
-            <a:noFill/>
-          </a:ln>
-          <a:effectLst/>
-        </p:spPr>
-        <p:style>
-          <a:lnRef idx="1">
-            <a:schemeClr val="accent1"/>
-          </a:lnRef>
-          <a:fillRef idx="3">
-            <a:schemeClr val="accent1"/>
-          </a:fillRef>
-          <a:effectRef idx="0">
-            <a:schemeClr val="accent1"/>
-          </a:effectRef>
-          <a:fontRef idx="minor">
-            <a:schemeClr val="lt1"/>
-          </a:fontRef>
-        </p:style>
-        <p:txBody>
-          <a:bodyPr rtlCol="0" anchor="ctr"/>
-          <a:lstStyle/>
-          <a:p>
-            <a:pPr algn="ctr"/>
-          </a:p>
-        </p:txBody>
-      </p:sp>
-      <p:sp>
-        <p:nvSpPr>
           <p:cNvPr id="14" name="TextBox 13"/>
           <p:cNvSpPr txBox="1"/>
           <p:nvPr/>
@@ -11574,7 +11299,7 @@
                 <a:solidFill>
                   <a:srgbClr val="FFFDF7"/>
                 </a:solidFill>
-                <a:latin typeface="Karla"/>
+                <a:latin typeface="Calibri"/>
               </a:rPr>
               <a:t>2</a:t>
             </a:r>
@@ -11613,11 +11338,11 @@
               </a:spcAft>
             </a:pPr>
             <a:r>
-              <a:rPr sz="1700" b="1" i="0">
+              <a:rPr sz="1700" b="0" i="0">
                 <a:solidFill>
                   <a:srgbClr val="262422"/>
                 </a:solidFill>
-                <a:latin typeface="Libre Caslon Display"/>
+                <a:latin typeface="Georgia"/>
               </a:rPr>
               <a:t>Next time you see a headline, which of the five questions will you ask first?</a:t>
             </a:r>
@@ -11660,7 +11385,7 @@
                 <a:solidFill>
                   <a:srgbClr val="34322F"/>
                 </a:solidFill>
-                <a:latin typeface="Karla"/>
+                <a:latin typeface="Calibri"/>
               </a:rPr>
               <a:t>Write your answers in the last box of your evidence sheet. It is yours to keep, and nothing is read out.</a:t>
             </a:r>
@@ -11728,7 +11453,7 @@
                 <a:solidFill>
                   <a:srgbClr val="8C877D"/>
                 </a:solidFill>
-                <a:latin typeface="Karla"/>
+                <a:latin typeface="Calibri"/>
               </a:rPr>
               <a:t>The Pastoral Guide</a:t>
             </a:r>
@@ -11771,7 +11496,7 @@
                 <a:solidFill>
                   <a:srgbClr val="8C877D"/>
                 </a:solidFill>
-                <a:latin typeface="Karla"/>
+                <a:latin typeface="Calibri"/>
               </a:rPr>
               <a:t>18 / 19</a:t>
             </a:r>
@@ -11888,7 +11613,7 @@
                 <a:solidFill>
                   <a:srgbClr val="34322F"/>
                 </a:solidFill>
-                <a:latin typeface="Karla"/>
+                <a:latin typeface="Calibri"/>
               </a:rPr>
               <a:t>FOR THE TEACHER  ·  SOURCES</a:t>
             </a:r>
@@ -11927,11 +11652,11 @@
               </a:spcAft>
             </a:pPr>
             <a:r>
-              <a:rPr sz="2600" b="1" i="0">
+              <a:rPr sz="2600" b="0" i="0">
                 <a:solidFill>
                   <a:srgbClr val="262422"/>
                 </a:solidFill>
-                <a:latin typeface="Libre Caslon Display"/>
+                <a:latin typeface="Georgia"/>
               </a:rPr>
               <a:t>Where the evidence came from</a:t>
             </a:r>
@@ -11974,7 +11699,7 @@
                 <a:solidFill>
                   <a:srgbClr val="262422"/>
                 </a:solidFill>
-                <a:latin typeface="Karla"/>
+                <a:latin typeface="Calibri"/>
               </a:rPr>
               <a:t>Mensink R. P. and Katan M. B. (1990). Effect of dietary trans fatty acids on high-density and low-density lipoprotein cholesterol levels in healthy subjects. New England Journal of Medicine, 323(7), 439–445.</a:t>
             </a:r>
@@ -12017,7 +11742,7 @@
                 <a:solidFill>
                   <a:srgbClr val="262422"/>
                 </a:solidFill>
-                <a:latin typeface="Karla"/>
+                <a:latin typeface="Calibri"/>
               </a:rPr>
               <a:t>World Health Organization (2024). Trans fat: fact sheet.</a:t>
             </a:r>
@@ -12060,7 +11785,7 @@
                 <a:solidFill>
                   <a:srgbClr val="262422"/>
                 </a:solidFill>
-                <a:latin typeface="Karla"/>
+                <a:latin typeface="Calibri"/>
               </a:rPr>
               <a:t>US Food and Drug Administration. Final determination regarding partially hydrogenated oils (2015).</a:t>
             </a:r>
@@ -12103,7 +11828,7 @@
                 <a:solidFill>
                   <a:srgbClr val="262422"/>
                 </a:solidFill>
-                <a:latin typeface="Karla"/>
+                <a:latin typeface="Calibri"/>
               </a:rPr>
               <a:t>NPR (2012). The forgotten, fascinating saga of Crisco. Wikipedia, Crisco, accessed September 2026.</a:t>
             </a:r>
@@ -12171,7 +11896,7 @@
                 <a:solidFill>
                   <a:srgbClr val="8C877D"/>
                 </a:solidFill>
-                <a:latin typeface="Karla"/>
+                <a:latin typeface="Calibri"/>
               </a:rPr>
               <a:t>The Pastoral Guide</a:t>
             </a:r>
@@ -12214,7 +11939,7 @@
                 <a:solidFill>
                   <a:srgbClr val="8C877D"/>
                 </a:solidFill>
-                <a:latin typeface="Karla"/>
+                <a:latin typeface="Calibri"/>
               </a:rPr>
               <a:t>19 / 19</a:t>
             </a:r>
@@ -12331,7 +12056,7 @@
                 <a:solidFill>
                   <a:srgbClr val="34322F"/>
                 </a:solidFill>
-                <a:latin typeface="Karla"/>
+                <a:latin typeface="Calibri"/>
               </a:rPr>
               <a:t>TEACHER SLIDE  ·  SKIP IT</a:t>
             </a:r>
@@ -12370,11 +12095,11 @@
               </a:spcAft>
             </a:pPr>
             <a:r>
-              <a:rPr sz="2800" b="1" i="0">
+              <a:rPr sz="2800" b="0" i="0">
                 <a:solidFill>
                   <a:srgbClr val="262422"/>
                 </a:solidFill>
-                <a:latin typeface="Libre Caslon Display"/>
+                <a:latin typeface="Georgia"/>
               </a:rPr>
               <a:t>Before the lesson</a:t>
             </a:r>
@@ -12417,7 +12142,7 @@
                 <a:solidFill>
                   <a:srgbClr val="56524B"/>
                 </a:solidFill>
-                <a:latin typeface="Karla"/>
+                <a:latin typeface="Calibri"/>
               </a:rPr>
               <a:t>This lesson is about how a new food was sold, and what an experiment showed about it later.</a:t>
             </a:r>
@@ -12548,7 +12273,7 @@
                 <a:solidFill>
                   <a:srgbClr val="FFFDF7"/>
                 </a:solidFill>
-                <a:latin typeface="Karla"/>
+                <a:latin typeface="Calibri"/>
               </a:rPr>
               <a:t>1</a:t>
             </a:r>
@@ -12587,11 +12312,11 @@
               </a:spcAft>
             </a:pPr>
             <a:r>
-              <a:rPr sz="1300" b="1" i="0">
+              <a:rPr sz="1300" b="0" i="0">
                 <a:solidFill>
                   <a:srgbClr val="262422"/>
                 </a:solidFill>
-                <a:latin typeface="Libre Caslon Display"/>
+                <a:latin typeface="Georgia"/>
               </a:rPr>
               <a:t>Print and cut the evidence cards</a:t>
             </a:r>
@@ -12634,7 +12359,7 @@
                 <a:solidFill>
                   <a:srgbClr val="56524B"/>
                 </a:solidFill>
-                <a:latin typeface="Karla"/>
+                <a:latin typeface="Calibri"/>
               </a:rPr>
               <a:t>One set of four per group of three or four. Keep them in order, A to D.</a:t>
             </a:r>
@@ -12765,7 +12490,7 @@
                 <a:solidFill>
                   <a:srgbClr val="FFFDF7"/>
                 </a:solidFill>
-                <a:latin typeface="Karla"/>
+                <a:latin typeface="Calibri"/>
               </a:rPr>
               <a:t>2</a:t>
             </a:r>
@@ -12804,11 +12529,11 @@
               </a:spcAft>
             </a:pPr>
             <a:r>
-              <a:rPr sz="1300" b="1" i="0">
+              <a:rPr sz="1300" b="0" i="0">
                 <a:solidFill>
                   <a:srgbClr val="262422"/>
                 </a:solidFill>
-                <a:latin typeface="Libre Caslon Display"/>
+                <a:latin typeface="Georgia"/>
               </a:rPr>
               <a:t>Print two sheets per student</a:t>
             </a:r>
@@ -12851,7 +12576,7 @@
                 <a:solidFill>
                   <a:srgbClr val="56524B"/>
                 </a:solidFill>
-                <a:latin typeface="Karla"/>
+                <a:latin typeface="Calibri"/>
               </a:rPr>
               <a:t>This lesson’s evidence sheet, and the front page sheet, which is the same every lesson.</a:t>
             </a:r>
@@ -12982,7 +12707,7 @@
                 <a:solidFill>
                   <a:srgbClr val="FFFDF7"/>
                 </a:solidFill>
-                <a:latin typeface="Karla"/>
+                <a:latin typeface="Calibri"/>
               </a:rPr>
               <a:t>3</a:t>
             </a:r>
@@ -13021,11 +12746,11 @@
               </a:spcAft>
             </a:pPr>
             <a:r>
-              <a:rPr sz="1300" b="1" i="0">
+              <a:rPr sz="1300" b="0" i="0">
                 <a:solidFill>
                   <a:srgbClr val="262422"/>
                 </a:solidFill>
-                <a:latin typeface="Libre Caslon Display"/>
+                <a:latin typeface="Georgia"/>
               </a:rPr>
               <a:t>Mark out the line</a:t>
             </a:r>
@@ -13068,7 +12793,7 @@
                 <a:solidFill>
                   <a:srgbClr val="56524B"/>
                 </a:solidFill>
-                <a:latin typeface="Karla"/>
+                <a:latin typeface="Calibri"/>
               </a:rPr>
               <a:t>A 0 at one end of the room and a 10 at the other: definitely false to definitely true.</a:t>
             </a:r>
@@ -13199,7 +12924,7 @@
                 <a:solidFill>
                   <a:srgbClr val="FFFDF7"/>
                 </a:solidFill>
-                <a:latin typeface="Karla"/>
+                <a:latin typeface="Calibri"/>
               </a:rPr>
               <a:t>4</a:t>
             </a:r>
@@ -13238,11 +12963,11 @@
               </a:spcAft>
             </a:pPr>
             <a:r>
-              <a:rPr sz="1300" b="1" i="0">
+              <a:rPr sz="1300" b="0" i="0">
                 <a:solidFill>
                   <a:srgbClr val="262422"/>
                 </a:solidFill>
-                <a:latin typeface="Libre Caslon Display"/>
+                <a:latin typeface="Georgia"/>
               </a:rPr>
               <a:t>Hold the cards back</a:t>
             </a:r>
@@ -13285,7 +13010,7 @@
                 <a:solidFill>
                   <a:srgbClr val="56524B"/>
                 </a:solidFill>
-                <a:latin typeface="Karla"/>
+                <a:latin typeface="Calibri"/>
               </a:rPr>
               <a:t>Hand out one card per round, never the next one early. The verdict stays hidden until the end.</a:t>
             </a:r>
@@ -13353,7 +13078,7 @@
                 <a:solidFill>
                   <a:srgbClr val="8C877D"/>
                 </a:solidFill>
-                <a:latin typeface="Karla"/>
+                <a:latin typeface="Calibri"/>
               </a:rPr>
               <a:t>The Pastoral Guide</a:t>
             </a:r>
@@ -13396,7 +13121,7 @@
                 <a:solidFill>
                   <a:srgbClr val="8C877D"/>
                 </a:solidFill>
-                <a:latin typeface="Karla"/>
+                <a:latin typeface="Calibri"/>
               </a:rPr>
               <a:t>2 / 19</a:t>
             </a:r>
@@ -13501,7 +13226,7 @@
                 <a:solidFill>
                   <a:srgbClr val="34322F"/>
                 </a:solidFill>
-                <a:latin typeface="Karla"/>
+                <a:latin typeface="Calibri"/>
               </a:rPr>
               <a:t>QUESTION THE HEADLINE  ·  LESSON 5 OF 5</a:t>
             </a:r>
@@ -13544,7 +13269,7 @@
                 <a:solidFill>
                   <a:srgbClr val="8C877D"/>
                 </a:solidFill>
-                <a:latin typeface="Karla"/>
+                <a:latin typeface="Calibri"/>
               </a:rPr>
               <a:t>A recreated front page</a:t>
             </a:r>
@@ -13627,11 +13352,11 @@
               </a:spcAft>
             </a:pPr>
             <a:r>
-              <a:rPr sz="3000" b="1" i="0">
+              <a:rPr sz="3000" b="0" i="0">
                 <a:solidFill>
                   <a:srgbClr val="262422"/>
                 </a:solidFill>
-                <a:latin typeface="Libre Caslon Display"/>
+                <a:latin typeface="Georgia"/>
               </a:rPr>
               <a:t>The Daily Claim</a:t>
             </a:r>
@@ -13718,7 +13443,7 @@
                 <a:solidFill>
                   <a:srgbClr val="56524B"/>
                 </a:solidFill>
-                <a:latin typeface="Karla"/>
+                <a:latin typeface="Calibri"/>
               </a:rPr>
               <a:t>CINCINNATI, 1912</a:t>
             </a:r>
@@ -13761,7 +13486,7 @@
                 <a:solidFill>
                   <a:srgbClr val="56524B"/>
                 </a:solidFill>
-                <a:latin typeface="Karla"/>
+                <a:latin typeface="Calibri"/>
               </a:rPr>
               <a:t>VOLUME ONE</a:t>
             </a:r>
@@ -13804,7 +13529,7 @@
                 <a:solidFill>
                   <a:srgbClr val="56524B"/>
                 </a:solidFill>
-                <a:latin typeface="Karla"/>
+                <a:latin typeface="Calibri"/>
               </a:rPr>
               <a:t>LESSON 5 OF 5</a:t>
             </a:r>
@@ -13887,11 +13612,11 @@
               </a:spcAft>
             </a:pPr>
             <a:r>
-              <a:rPr sz="2800" b="1" i="0">
+              <a:rPr sz="2800" b="0" i="0">
                 <a:solidFill>
                   <a:srgbClr val="262422"/>
                 </a:solidFill>
-                <a:latin typeface="Libre Caslon Display"/>
+                <a:latin typeface="Georgia"/>
               </a:rPr>
               <a:t>IT’S ALL VEGETABLE!</a:t>
             </a:r>
@@ -13899,11 +13624,11 @@
               <a:rPr lang="en-GB"/>
             </a:br>
             <a:r>
-              <a:rPr sz="2800" b="1" i="0">
+              <a:rPr sz="2800" b="0" i="0">
                 <a:solidFill>
                   <a:srgbClr val="262422"/>
                 </a:solidFill>
-                <a:latin typeface="Libre Caslon Display"/>
+                <a:latin typeface="Georgia"/>
               </a:rPr>
               <a:t>IT’S DIGESTIBLE!</a:t>
             </a:r>
@@ -14291,11 +14016,11 @@
               </a:spcAft>
             </a:pPr>
             <a:r>
-              <a:rPr sz="1500" b="1" i="0">
+              <a:rPr sz="1500" b="0" i="0">
                 <a:solidFill>
                   <a:srgbClr val="34322F"/>
                 </a:solidFill>
-                <a:latin typeface="Libre Caslon Display"/>
+                <a:latin typeface="Georgia"/>
               </a:rPr>
               <a:t>Healthier and more cost-effective than butter and other fats.</a:t>
             </a:r>
@@ -14338,7 +14063,7 @@
                 <a:solidFill>
                   <a:srgbClr val="56524B"/>
                 </a:solidFill>
-                <a:latin typeface="Karla"/>
+                <a:latin typeface="Calibri"/>
               </a:rPr>
               <a:t>HOW CRISCO WAS ADVERTISED</a:t>
             </a:r>
@@ -14406,7 +14131,7 @@
                 <a:solidFill>
                   <a:srgbClr val="8C877D"/>
                 </a:solidFill>
-                <a:latin typeface="Karla"/>
+                <a:latin typeface="Calibri"/>
               </a:rPr>
               <a:t>The Pastoral Guide</a:t>
             </a:r>
@@ -14449,7 +14174,7 @@
                 <a:solidFill>
                   <a:srgbClr val="8C877D"/>
                 </a:solidFill>
-                <a:latin typeface="Karla"/>
+                <a:latin typeface="Calibri"/>
               </a:rPr>
               <a:t>3 / 19</a:t>
             </a:r>
@@ -14554,64 +14279,9 @@
                 <a:solidFill>
                   <a:srgbClr val="34322F"/>
                 </a:solidFill>
-                <a:latin typeface="Karla"/>
+                <a:latin typeface="Calibri"/>
               </a:rPr>
               <a:t>QUESTION THE HEADLINE  ·  LESSON 5 OF 5</a:t>
-            </a:r>
-          </a:p>
-        </p:txBody>
-      </p:sp>
-      <p:sp>
-        <p:nvSpPr>
-          <p:cNvPr id="4" name="Rounded Rectangle 3"/>
-          <p:cNvSpPr/>
-          <p:nvPr/>
-        </p:nvSpPr>
-        <p:spPr>
-          <a:xfrm>
-            <a:off x="7398742" y="246888"/>
-            <a:ext cx="1059457" cy="237744"/>
-          </a:xfrm>
-          <a:prstGeom prst="roundRect">
-            <a:avLst>
-              <a:gd name="adj" fmla="val 50000"/>
-            </a:avLst>
-          </a:prstGeom>
-          <a:solidFill>
-            <a:srgbClr val="34322F"/>
-          </a:solidFill>
-          <a:ln>
-            <a:noFill/>
-          </a:ln>
-          <a:effectLst/>
-        </p:spPr>
-        <p:style>
-          <a:lnRef idx="1">
-            <a:schemeClr val="accent1"/>
-          </a:lnRef>
-          <a:fillRef idx="3">
-            <a:schemeClr val="accent1"/>
-          </a:fillRef>
-          <a:effectRef idx="0">
-            <a:schemeClr val="accent1"/>
-          </a:effectRef>
-          <a:fontRef idx="minor">
-            <a:schemeClr val="lt1"/>
-          </a:fontRef>
-        </p:style>
-        <p:txBody>
-          <a:bodyPr rtlCol="0" anchor="ctr" wrap="none" lIns="0" rIns="0" tIns="0" bIns="0"/>
-          <a:lstStyle/>
-          <a:p>
-            <a:pPr algn="ctr"/>
-            <a:r>
-              <a:rPr sz="950" b="1" spc="90">
-                <a:solidFill>
-                  <a:srgbClr val="FFFDF7"/>
-                </a:solidFill>
-                <a:latin typeface="Karla"/>
-              </a:rPr>
-              <a:t>STAND UP</a:t>
             </a:r>
           </a:p>
         </p:txBody>
@@ -14648,11 +14318,11 @@
               </a:spcAft>
             </a:pPr>
             <a:r>
-              <a:rPr sz="2800" b="1" i="0">
+              <a:rPr sz="2800" b="0" i="0">
                 <a:solidFill>
                   <a:srgbClr val="262422"/>
                 </a:solidFill>
-                <a:latin typeface="Libre Caslon Display"/>
+                <a:latin typeface="Georgia"/>
               </a:rPr>
               <a:t>How much do you believe it?</a:t>
             </a:r>
@@ -14785,11 +14455,11 @@
               </a:spcAft>
             </a:pPr>
             <a:r>
-              <a:rPr sz="1800" b="1" i="0">
+              <a:rPr sz="1800" b="0" i="0">
                 <a:solidFill>
                   <a:srgbClr val="262422"/>
                 </a:solidFill>
-                <a:latin typeface="Libre Caslon Display"/>
+                <a:latin typeface="Georgia"/>
               </a:rPr>
               <a:t>“A new food made in a factory by scientists is probably better for you than the old one.”</a:t>
             </a:r>
@@ -14920,7 +14590,7 @@
                 <a:solidFill>
                   <a:srgbClr val="262422"/>
                 </a:solidFill>
-                <a:latin typeface="Karla"/>
+                <a:latin typeface="Calibri"/>
               </a:rPr>
               <a:t>0</a:t>
             </a:r>
@@ -15007,7 +14677,7 @@
                 <a:solidFill>
                   <a:srgbClr val="56524B"/>
                 </a:solidFill>
-                <a:latin typeface="Karla"/>
+                <a:latin typeface="Calibri"/>
               </a:rPr>
               <a:t>1</a:t>
             </a:r>
@@ -15094,7 +14764,7 @@
                 <a:solidFill>
                   <a:srgbClr val="56524B"/>
                 </a:solidFill>
-                <a:latin typeface="Karla"/>
+                <a:latin typeface="Calibri"/>
               </a:rPr>
               <a:t>2</a:t>
             </a:r>
@@ -15181,7 +14851,7 @@
                 <a:solidFill>
                   <a:srgbClr val="56524B"/>
                 </a:solidFill>
-                <a:latin typeface="Karla"/>
+                <a:latin typeface="Calibri"/>
               </a:rPr>
               <a:t>3</a:t>
             </a:r>
@@ -15268,7 +14938,7 @@
                 <a:solidFill>
                   <a:srgbClr val="56524B"/>
                 </a:solidFill>
-                <a:latin typeface="Karla"/>
+                <a:latin typeface="Calibri"/>
               </a:rPr>
               <a:t>4</a:t>
             </a:r>
@@ -15355,7 +15025,7 @@
                 <a:solidFill>
                   <a:srgbClr val="262422"/>
                 </a:solidFill>
-                <a:latin typeface="Karla"/>
+                <a:latin typeface="Calibri"/>
               </a:rPr>
               <a:t>5</a:t>
             </a:r>
@@ -15442,7 +15112,7 @@
                 <a:solidFill>
                   <a:srgbClr val="56524B"/>
                 </a:solidFill>
-                <a:latin typeface="Karla"/>
+                <a:latin typeface="Calibri"/>
               </a:rPr>
               <a:t>6</a:t>
             </a:r>
@@ -15529,7 +15199,7 @@
                 <a:solidFill>
                   <a:srgbClr val="56524B"/>
                 </a:solidFill>
-                <a:latin typeface="Karla"/>
+                <a:latin typeface="Calibri"/>
               </a:rPr>
               <a:t>7</a:t>
             </a:r>
@@ -15616,7 +15286,7 @@
                 <a:solidFill>
                   <a:srgbClr val="56524B"/>
                 </a:solidFill>
-                <a:latin typeface="Karla"/>
+                <a:latin typeface="Calibri"/>
               </a:rPr>
               <a:t>8</a:t>
             </a:r>
@@ -15703,7 +15373,7 @@
                 <a:solidFill>
                   <a:srgbClr val="56524B"/>
                 </a:solidFill>
-                <a:latin typeface="Karla"/>
+                <a:latin typeface="Calibri"/>
               </a:rPr>
               <a:t>9</a:t>
             </a:r>
@@ -15790,7 +15460,7 @@
                 <a:solidFill>
                   <a:srgbClr val="262422"/>
                 </a:solidFill>
-                <a:latin typeface="Karla"/>
+                <a:latin typeface="Calibri"/>
               </a:rPr>
               <a:t>10</a:t>
             </a:r>
@@ -15833,7 +15503,7 @@
                 <a:solidFill>
                   <a:srgbClr val="34322F"/>
                 </a:solidFill>
-                <a:latin typeface="Karla"/>
+                <a:latin typeface="Calibri"/>
               </a:rPr>
               <a:t>Definitely false</a:t>
             </a:r>
@@ -15876,7 +15546,7 @@
                 <a:solidFill>
                   <a:srgbClr val="34322F"/>
                 </a:solidFill>
-                <a:latin typeface="Karla"/>
+                <a:latin typeface="Calibri"/>
               </a:rPr>
               <a:t>Definitely true</a:t>
             </a:r>
@@ -15919,7 +15589,7 @@
                 <a:solidFill>
                   <a:srgbClr val="34322F"/>
                 </a:solidFill>
-                <a:latin typeface="Karla"/>
+                <a:latin typeface="Calibri"/>
               </a:rPr>
               <a:t>Stand on the line where you are now. Two or three people say why they are standing there.</a:t>
             </a:r>
@@ -15987,7 +15657,7 @@
                 <a:solidFill>
                   <a:srgbClr val="8C877D"/>
                 </a:solidFill>
-                <a:latin typeface="Karla"/>
+                <a:latin typeface="Calibri"/>
               </a:rPr>
               <a:t>The Pastoral Guide</a:t>
             </a:r>
@@ -16030,7 +15700,7 @@
                 <a:solidFill>
                   <a:srgbClr val="8C877D"/>
                 </a:solidFill>
-                <a:latin typeface="Karla"/>
+                <a:latin typeface="Calibri"/>
               </a:rPr>
               <a:t>4 / 19</a:t>
             </a:r>
@@ -16135,64 +15805,9 @@
                 <a:solidFill>
                   <a:srgbClr val="34322F"/>
                 </a:solidFill>
-                <a:latin typeface="Karla"/>
+                <a:latin typeface="Calibri"/>
               </a:rPr>
               <a:t>QUESTION THE HEADLINE  ·  LESSON 5 OF 5</a:t>
-            </a:r>
-          </a:p>
-        </p:txBody>
-      </p:sp>
-      <p:sp>
-        <p:nvSpPr>
-          <p:cNvPr id="4" name="Rounded Rectangle 3"/>
-          <p:cNvSpPr/>
-          <p:nvPr/>
-        </p:nvSpPr>
-        <p:spPr>
-          <a:xfrm>
-            <a:off x="7658580" y="246888"/>
-            <a:ext cx="799619" cy="237744"/>
-          </a:xfrm>
-          <a:prstGeom prst="roundRect">
-            <a:avLst>
-              <a:gd name="adj" fmla="val 50000"/>
-            </a:avLst>
-          </a:prstGeom>
-          <a:solidFill>
-            <a:srgbClr val="34322F"/>
-          </a:solidFill>
-          <a:ln>
-            <a:noFill/>
-          </a:ln>
-          <a:effectLst/>
-        </p:spPr>
-        <p:style>
-          <a:lnRef idx="1">
-            <a:schemeClr val="accent1"/>
-          </a:lnRef>
-          <a:fillRef idx="3">
-            <a:schemeClr val="accent1"/>
-          </a:fillRef>
-          <a:effectRef idx="0">
-            <a:schemeClr val="accent1"/>
-          </a:effectRef>
-          <a:fontRef idx="minor">
-            <a:schemeClr val="lt1"/>
-          </a:fontRef>
-        </p:style>
-        <p:txBody>
-          <a:bodyPr rtlCol="0" anchor="ctr" wrap="none" lIns="0" rIns="0" tIns="0" bIns="0"/>
-          <a:lstStyle/>
-          <a:p>
-            <a:pPr algn="ctr"/>
-            <a:r>
-              <a:rPr sz="950" b="1" spc="90">
-                <a:solidFill>
-                  <a:srgbClr val="FFFDF7"/>
-                </a:solidFill>
-                <a:latin typeface="Karla"/>
-              </a:rPr>
-              <a:t>TEACH</a:t>
             </a:r>
           </a:p>
         </p:txBody>
@@ -16229,11 +15844,11 @@
               </a:spcAft>
             </a:pPr>
             <a:r>
-              <a:rPr sz="2800" b="1" i="0">
+              <a:rPr sz="2800" b="0" i="0">
                 <a:solidFill>
                   <a:srgbClr val="262422"/>
                 </a:solidFill>
-                <a:latin typeface="Libre Caslon Display"/>
+                <a:latin typeface="Georgia"/>
               </a:rPr>
               <a:t>Five questions for any headline</a:t>
             </a:r>
@@ -16385,11 +16000,11 @@
               </a:spcAft>
             </a:pPr>
             <a:r>
-              <a:rPr sz="1300" b="1" i="0">
+              <a:rPr sz="1300" b="0" i="0">
                 <a:solidFill>
                   <a:srgbClr val="262422"/>
                 </a:solidFill>
-                <a:latin typeface="Libre Caslon Display"/>
+                <a:latin typeface="Georgia"/>
               </a:rPr>
               <a:t>Who is saying it?</a:t>
             </a:r>
@@ -16432,7 +16047,7 @@
                 <a:solidFill>
                   <a:srgbClr val="56524B"/>
                 </a:solidFill>
-                <a:latin typeface="Karla"/>
+                <a:latin typeface="Calibri"/>
               </a:rPr>
               <a:t>A company, a scientist, a newspaper, a government? Check the name.</a:t>
             </a:r>
@@ -16584,11 +16199,11 @@
               </a:spcAft>
             </a:pPr>
             <a:r>
-              <a:rPr sz="1300" b="1" i="0">
+              <a:rPr sz="1300" b="0" i="0">
                 <a:solidFill>
                   <a:srgbClr val="262422"/>
                 </a:solidFill>
-                <a:latin typeface="Libre Caslon Display"/>
+                <a:latin typeface="Georgia"/>
               </a:rPr>
               <a:t>Who gains if I believe it?</a:t>
             </a:r>
@@ -16631,7 +16246,7 @@
                 <a:solidFill>
                   <a:srgbClr val="56524B"/>
                 </a:solidFill>
-                <a:latin typeface="Karla"/>
+                <a:latin typeface="Calibri"/>
               </a:rPr>
               <a:t>Somebody always does. Work out who, and what they get.</a:t>
             </a:r>
@@ -16783,11 +16398,11 @@
               </a:spcAft>
             </a:pPr>
             <a:r>
-              <a:rPr sz="1300" b="1" i="0">
+              <a:rPr sz="1300" b="0" i="0">
                 <a:solidFill>
                   <a:srgbClr val="262422"/>
                 </a:solidFill>
-                <a:latin typeface="Libre Caslon Display"/>
+                <a:latin typeface="Georgia"/>
               </a:rPr>
               <a:t>Who paid for it?</a:t>
             </a:r>
@@ -16830,7 +16445,7 @@
                 <a:solidFill>
                   <a:srgbClr val="56524B"/>
                 </a:solidFill>
-                <a:latin typeface="Karla"/>
+                <a:latin typeface="Calibri"/>
               </a:rPr>
               <a:t>The research, the advert, the survey. Money does not make it false, but you should know.</a:t>
             </a:r>
@@ -16982,11 +16597,11 @@
               </a:spcAft>
             </a:pPr>
             <a:r>
-              <a:rPr sz="1300" b="1" i="0">
+              <a:rPr sz="1300" b="0" i="0">
                 <a:solidFill>
                   <a:srgbClr val="262422"/>
                 </a:solidFill>
-                <a:latin typeface="Libre Caslon Display"/>
+                <a:latin typeface="Georgia"/>
               </a:rPr>
               <a:t>What is the evidence?</a:t>
             </a:r>
@@ -17029,7 +16644,7 @@
                 <a:solidFill>
                   <a:srgbClr val="56524B"/>
                 </a:solidFill>
-                <a:latin typeface="Karla"/>
+                <a:latin typeface="Calibri"/>
               </a:rPr>
               <a:t>A study, a number, a graph? Or only a slogan and a famous face?</a:t>
             </a:r>
@@ -17181,11 +16796,11 @@
               </a:spcAft>
             </a:pPr>
             <a:r>
-              <a:rPr sz="1300" b="1" i="0">
+              <a:rPr sz="1300" b="0" i="0">
                 <a:solidFill>
                   <a:srgbClr val="262422"/>
                 </a:solidFill>
-                <a:latin typeface="Libre Caslon Display"/>
+                <a:latin typeface="Georgia"/>
               </a:rPr>
               <a:t>Has it been tested, and by whom?</a:t>
             </a:r>
@@ -17228,7 +16843,7 @@
                 <a:solidFill>
                   <a:srgbClr val="56524B"/>
                 </a:solidFill>
-                <a:latin typeface="Karla"/>
+                <a:latin typeface="Calibri"/>
               </a:rPr>
               <a:t>Tested on whom, for how long, and by somebody with nothing to gain?</a:t>
             </a:r>
@@ -17271,7 +16886,7 @@
                 <a:solidFill>
                   <a:srgbClr val="34322F"/>
                 </a:solidFill>
-                <a:latin typeface="Karla"/>
+                <a:latin typeface="Calibri"/>
               </a:rPr>
               <a:t>These five come back in every lesson. The first one is on the front page already.</a:t>
             </a:r>
@@ -17339,7 +16954,7 @@
                 <a:solidFill>
                   <a:srgbClr val="8C877D"/>
                 </a:solidFill>
-                <a:latin typeface="Karla"/>
+                <a:latin typeface="Calibri"/>
               </a:rPr>
               <a:t>The Pastoral Guide</a:t>
             </a:r>
@@ -17382,7 +16997,7 @@
                 <a:solidFill>
                   <a:srgbClr val="8C877D"/>
                 </a:solidFill>
-                <a:latin typeface="Karla"/>
+                <a:latin typeface="Calibri"/>
               </a:rPr>
               <a:t>5 / 19</a:t>
             </a:r>
@@ -17487,7 +17102,7 @@
                 <a:solidFill>
                   <a:srgbClr val="34322F"/>
                 </a:solidFill>
-                <a:latin typeface="Karla"/>
+                <a:latin typeface="Calibri"/>
               </a:rPr>
               <a:t>QUESTION THE HEADLINE  ·  LESSON 5 OF 5</a:t>
             </a:r>
@@ -17496,19 +17111,147 @@
       </p:sp>
       <p:sp>
         <p:nvSpPr>
-          <p:cNvPr id="4" name="Rounded Rectangle 3"/>
+          <p:cNvPr id="5" name="TextBox 4"/>
+          <p:cNvSpPr txBox="1"/>
+          <p:nvPr/>
+        </p:nvSpPr>
+        <p:spPr>
+          <a:xfrm>
+            <a:off x="685800" y="566928"/>
+            <a:ext cx="7772400" cy="434848"/>
+          </a:xfrm>
+          <a:prstGeom prst="rect">
+            <a:avLst/>
+          </a:prstGeom>
+          <a:noFill/>
+          <a:effectLst/>
+        </p:spPr>
+        <p:txBody>
+          <a:bodyPr wrap="square" anchor="t" lIns="0" rIns="0" tIns="0" bIns="0">
+            <a:spAutoFit/>
+          </a:bodyPr>
+          <a:lstStyle/>
+          <a:p>
+            <a:pPr algn="l">
+              <a:lnSpc>
+                <a:spcPct val="105000"/>
+              </a:lnSpc>
+              <a:spcAft>
+                <a:spcPts val="0"/>
+              </a:spcAft>
+            </a:pPr>
+            <a:r>
+              <a:rPr sz="2800" b="0" i="0">
+                <a:solidFill>
+                  <a:srgbClr val="262422"/>
+                </a:solidFill>
+                <a:latin typeface="Georgia"/>
+              </a:rPr>
+              <a:t>Watch the first one</a:t>
+            </a:r>
+          </a:p>
+        </p:txBody>
+      </p:sp>
+      <p:sp>
+        <p:nvSpPr>
+          <p:cNvPr id="6" name="TextBox 5"/>
+          <p:cNvSpPr txBox="1"/>
+          <p:nvPr/>
+        </p:nvSpPr>
+        <p:spPr>
+          <a:xfrm>
+            <a:off x="685800" y="1170432"/>
+            <a:ext cx="7772400" cy="274320"/>
+          </a:xfrm>
+          <a:prstGeom prst="rect">
+            <a:avLst/>
+          </a:prstGeom>
+          <a:noFill/>
+          <a:effectLst/>
+        </p:spPr>
+        <p:txBody>
+          <a:bodyPr wrap="square" anchor="t" lIns="0" rIns="0" tIns="0" bIns="0">
+            <a:spAutoFit/>
+          </a:bodyPr>
+          <a:lstStyle/>
+          <a:p>
+            <a:pPr algn="l">
+              <a:lnSpc>
+                <a:spcPct val="125000"/>
+              </a:lnSpc>
+              <a:spcAft>
+                <a:spcPts val="0"/>
+              </a:spcAft>
+            </a:pPr>
+            <a:r>
+              <a:rPr sz="1600" b="0" i="0">
+                <a:solidFill>
+                  <a:srgbClr val="34322F"/>
+                </a:solidFill>
+                <a:latin typeface="Georgia"/>
+              </a:rPr>
+              <a:t>Question 1:  Who is saying it?</a:t>
+            </a:r>
+          </a:p>
+        </p:txBody>
+      </p:sp>
+      <p:sp>
+        <p:nvSpPr>
+          <p:cNvPr id="7" name="Rectangle 6"/>
           <p:cNvSpPr/>
           <p:nvPr/>
         </p:nvSpPr>
         <p:spPr>
           <a:xfrm>
-            <a:off x="7624101" y="246888"/>
-            <a:ext cx="834098" cy="237744"/>
-          </a:xfrm>
-          <a:prstGeom prst="roundRect">
-            <a:avLst>
-              <a:gd name="adj" fmla="val 50000"/>
-            </a:avLst>
+            <a:off x="685800" y="1609344"/>
+            <a:ext cx="7772400" cy="985520"/>
+          </a:xfrm>
+          <a:prstGeom prst="rect">
+            <a:avLst/>
+          </a:prstGeom>
+          <a:solidFill>
+            <a:srgbClr val="FFFFFF"/>
+          </a:solidFill>
+          <a:ln>
+            <a:noFill/>
+          </a:ln>
+          <a:effectLst/>
+        </p:spPr>
+        <p:style>
+          <a:lnRef idx="1">
+            <a:schemeClr val="accent1"/>
+          </a:lnRef>
+          <a:fillRef idx="3">
+            <a:schemeClr val="accent1"/>
+          </a:fillRef>
+          <a:effectRef idx="0">
+            <a:schemeClr val="accent1"/>
+          </a:effectRef>
+          <a:fontRef idx="minor">
+            <a:schemeClr val="lt1"/>
+          </a:fontRef>
+        </p:style>
+        <p:txBody>
+          <a:bodyPr rtlCol="0" anchor="ctr"/>
+          <a:lstStyle/>
+          <a:p>
+            <a:pPr algn="ctr"/>
+          </a:p>
+        </p:txBody>
+      </p:sp>
+      <p:sp>
+        <p:nvSpPr>
+          <p:cNvPr id="8" name="Rectangle 7"/>
+          <p:cNvSpPr/>
+          <p:nvPr/>
+        </p:nvSpPr>
+        <p:spPr>
+          <a:xfrm>
+            <a:off x="685800" y="1609344"/>
+            <a:ext cx="45720" cy="985520"/>
+          </a:xfrm>
+          <a:prstGeom prst="rect">
+            <a:avLst/>
           </a:prstGeom>
           <a:solidFill>
             <a:srgbClr val="34322F"/>
@@ -17533,189 +17276,6 @@
           </a:fontRef>
         </p:style>
         <p:txBody>
-          <a:bodyPr rtlCol="0" anchor="ctr" wrap="none" lIns="0" rIns="0" tIns="0" bIns="0"/>
-          <a:lstStyle/>
-          <a:p>
-            <a:pPr algn="ctr"/>
-            <a:r>
-              <a:rPr sz="950" b="1" spc="90">
-                <a:solidFill>
-                  <a:srgbClr val="FFFDF7"/>
-                </a:solidFill>
-                <a:latin typeface="Karla"/>
-              </a:rPr>
-              <a:t>MODEL</a:t>
-            </a:r>
-          </a:p>
-        </p:txBody>
-      </p:sp>
-      <p:sp>
-        <p:nvSpPr>
-          <p:cNvPr id="5" name="TextBox 4"/>
-          <p:cNvSpPr txBox="1"/>
-          <p:nvPr/>
-        </p:nvSpPr>
-        <p:spPr>
-          <a:xfrm>
-            <a:off x="685800" y="566928"/>
-            <a:ext cx="7772400" cy="434848"/>
-          </a:xfrm>
-          <a:prstGeom prst="rect">
-            <a:avLst/>
-          </a:prstGeom>
-          <a:noFill/>
-          <a:effectLst/>
-        </p:spPr>
-        <p:txBody>
-          <a:bodyPr wrap="square" anchor="t" lIns="0" rIns="0" tIns="0" bIns="0">
-            <a:spAutoFit/>
-          </a:bodyPr>
-          <a:lstStyle/>
-          <a:p>
-            <a:pPr algn="l">
-              <a:lnSpc>
-                <a:spcPct val="105000"/>
-              </a:lnSpc>
-              <a:spcAft>
-                <a:spcPts val="0"/>
-              </a:spcAft>
-            </a:pPr>
-            <a:r>
-              <a:rPr sz="2800" b="1" i="0">
-                <a:solidFill>
-                  <a:srgbClr val="262422"/>
-                </a:solidFill>
-                <a:latin typeface="Libre Caslon Display"/>
-              </a:rPr>
-              <a:t>Watch the first one</a:t>
-            </a:r>
-          </a:p>
-        </p:txBody>
-      </p:sp>
-      <p:sp>
-        <p:nvSpPr>
-          <p:cNvPr id="6" name="TextBox 5"/>
-          <p:cNvSpPr txBox="1"/>
-          <p:nvPr/>
-        </p:nvSpPr>
-        <p:spPr>
-          <a:xfrm>
-            <a:off x="685800" y="1170432"/>
-            <a:ext cx="7772400" cy="274320"/>
-          </a:xfrm>
-          <a:prstGeom prst="rect">
-            <a:avLst/>
-          </a:prstGeom>
-          <a:noFill/>
-          <a:effectLst/>
-        </p:spPr>
-        <p:txBody>
-          <a:bodyPr wrap="square" anchor="t" lIns="0" rIns="0" tIns="0" bIns="0">
-            <a:spAutoFit/>
-          </a:bodyPr>
-          <a:lstStyle/>
-          <a:p>
-            <a:pPr algn="l">
-              <a:lnSpc>
-                <a:spcPct val="125000"/>
-              </a:lnSpc>
-              <a:spcAft>
-                <a:spcPts val="0"/>
-              </a:spcAft>
-            </a:pPr>
-            <a:r>
-              <a:rPr sz="1600" b="1" i="0">
-                <a:solidFill>
-                  <a:srgbClr val="34322F"/>
-                </a:solidFill>
-                <a:latin typeface="Libre Caslon Display"/>
-              </a:rPr>
-              <a:t>Question 1:  Who is saying it?</a:t>
-            </a:r>
-          </a:p>
-        </p:txBody>
-      </p:sp>
-      <p:sp>
-        <p:nvSpPr>
-          <p:cNvPr id="7" name="Rectangle 6"/>
-          <p:cNvSpPr/>
-          <p:nvPr/>
-        </p:nvSpPr>
-        <p:spPr>
-          <a:xfrm>
-            <a:off x="685800" y="1609344"/>
-            <a:ext cx="7772400" cy="985520"/>
-          </a:xfrm>
-          <a:prstGeom prst="rect">
-            <a:avLst/>
-          </a:prstGeom>
-          <a:solidFill>
-            <a:srgbClr val="FFFFFF"/>
-          </a:solidFill>
-          <a:ln>
-            <a:noFill/>
-          </a:ln>
-          <a:effectLst/>
-        </p:spPr>
-        <p:style>
-          <a:lnRef idx="1">
-            <a:schemeClr val="accent1"/>
-          </a:lnRef>
-          <a:fillRef idx="3">
-            <a:schemeClr val="accent1"/>
-          </a:fillRef>
-          <a:effectRef idx="0">
-            <a:schemeClr val="accent1"/>
-          </a:effectRef>
-          <a:fontRef idx="minor">
-            <a:schemeClr val="lt1"/>
-          </a:fontRef>
-        </p:style>
-        <p:txBody>
-          <a:bodyPr rtlCol="0" anchor="ctr"/>
-          <a:lstStyle/>
-          <a:p>
-            <a:pPr algn="ctr"/>
-          </a:p>
-        </p:txBody>
-      </p:sp>
-      <p:sp>
-        <p:nvSpPr>
-          <p:cNvPr id="8" name="Rectangle 7"/>
-          <p:cNvSpPr/>
-          <p:nvPr/>
-        </p:nvSpPr>
-        <p:spPr>
-          <a:xfrm>
-            <a:off x="685800" y="1609344"/>
-            <a:ext cx="45720" cy="985520"/>
-          </a:xfrm>
-          <a:prstGeom prst="rect">
-            <a:avLst/>
-          </a:prstGeom>
-          <a:solidFill>
-            <a:srgbClr val="34322F"/>
-          </a:solidFill>
-          <a:ln>
-            <a:noFill/>
-          </a:ln>
-          <a:effectLst/>
-        </p:spPr>
-        <p:style>
-          <a:lnRef idx="1">
-            <a:schemeClr val="accent1"/>
-          </a:lnRef>
-          <a:fillRef idx="3">
-            <a:schemeClr val="accent1"/>
-          </a:fillRef>
-          <a:effectRef idx="0">
-            <a:schemeClr val="accent1"/>
-          </a:effectRef>
-          <a:fontRef idx="minor">
-            <a:schemeClr val="lt1"/>
-          </a:fontRef>
-        </p:style>
-        <p:txBody>
           <a:bodyPr rtlCol="0" anchor="ctr"/>
           <a:lstStyle/>
           <a:p>
@@ -17759,7 +17319,7 @@
                 <a:solidFill>
                   <a:srgbClr val="262422"/>
                 </a:solidFill>
-                <a:latin typeface="Karla"/>
+                <a:latin typeface="Calibri"/>
               </a:rPr>
               <a:t>The company that makes Crisco, which gains from every tin it sells. The front page says it is healthier, and gives no evidence for that.</a:t>
             </a:r>
@@ -17802,7 +17362,7 @@
                 <a:solidFill>
                   <a:srgbClr val="56524B"/>
                 </a:solidFill>
-                <a:latin typeface="Karla"/>
+                <a:latin typeface="Calibri"/>
               </a:rPr>
               <a:t>Notice the answer is not true or false. It tells you what to look for next.</a:t>
             </a:r>
@@ -17870,7 +17430,7 @@
                 <a:solidFill>
                   <a:srgbClr val="8C877D"/>
                 </a:solidFill>
-                <a:latin typeface="Karla"/>
+                <a:latin typeface="Calibri"/>
               </a:rPr>
               <a:t>The Pastoral Guide</a:t>
             </a:r>
@@ -17913,7 +17473,7 @@
                 <a:solidFill>
                   <a:srgbClr val="8C877D"/>
                 </a:solidFill>
-                <a:latin typeface="Karla"/>
+                <a:latin typeface="Calibri"/>
               </a:rPr>
               <a:t>6 / 19</a:t>
             </a:r>
@@ -18018,64 +17578,9 @@
                 <a:solidFill>
                   <a:srgbClr val="34322F"/>
                 </a:solidFill>
-                <a:latin typeface="Karla"/>
+                <a:latin typeface="Calibri"/>
               </a:rPr>
               <a:t>QUESTION THE HEADLINE  ·  LESSON 5 OF 5</a:t>
-            </a:r>
-          </a:p>
-        </p:txBody>
-      </p:sp>
-      <p:sp>
-        <p:nvSpPr>
-          <p:cNvPr id="4" name="Rounded Rectangle 3"/>
-          <p:cNvSpPr/>
-          <p:nvPr/>
-        </p:nvSpPr>
-        <p:spPr>
-          <a:xfrm>
-            <a:off x="7356624" y="246888"/>
-            <a:ext cx="1101575" cy="237744"/>
-          </a:xfrm>
-          <a:prstGeom prst="roundRect">
-            <a:avLst>
-              <a:gd name="adj" fmla="val 50000"/>
-            </a:avLst>
-          </a:prstGeom>
-          <a:solidFill>
-            <a:srgbClr val="34322F"/>
-          </a:solidFill>
-          <a:ln>
-            <a:noFill/>
-          </a:ln>
-          <a:effectLst/>
-        </p:spPr>
-        <p:style>
-          <a:lnRef idx="1">
-            <a:schemeClr val="accent1"/>
-          </a:lnRef>
-          <a:fillRef idx="3">
-            <a:schemeClr val="accent1"/>
-          </a:fillRef>
-          <a:effectRef idx="0">
-            <a:schemeClr val="accent1"/>
-          </a:effectRef>
-          <a:fontRef idx="minor">
-            <a:schemeClr val="lt1"/>
-          </a:fontRef>
-        </p:style>
-        <p:txBody>
-          <a:bodyPr rtlCol="0" anchor="ctr" wrap="none" lIns="0" rIns="0" tIns="0" bIns="0"/>
-          <a:lstStyle/>
-          <a:p>
-            <a:pPr algn="ctr"/>
-            <a:r>
-              <a:rPr sz="950" b="1" spc="90">
-                <a:solidFill>
-                  <a:srgbClr val="FFFDF7"/>
-                </a:solidFill>
-                <a:latin typeface="Karla"/>
-              </a:rPr>
-              <a:t>TOGETHER</a:t>
             </a:r>
           </a:p>
         </p:txBody>
@@ -18112,11 +17617,11 @@
               </a:spcAft>
             </a:pPr>
             <a:r>
-              <a:rPr sz="2800" b="1" i="0">
+              <a:rPr sz="2800" b="0" i="0">
                 <a:solidFill>
                   <a:srgbClr val="262422"/>
                 </a:solidFill>
-                <a:latin typeface="Libre Caslon Display"/>
+                <a:latin typeface="Georgia"/>
               </a:rPr>
               <a:t>Now the other four</a:t>
             </a:r>
@@ -18159,7 +17664,7 @@
                 <a:solidFill>
                   <a:srgbClr val="56524B"/>
                 </a:solidFill>
-                <a:latin typeface="Karla"/>
+                <a:latin typeface="Calibri"/>
               </a:rPr>
               <a:t>Can the front page answer them? Talk it through in your group.</a:t>
             </a:r>
@@ -18355,11 +17860,11 @@
               </a:spcAft>
             </a:pPr>
             <a:r>
-              <a:rPr sz="1300" b="1" i="0">
+              <a:rPr sz="1300" b="0" i="0">
                 <a:solidFill>
                   <a:srgbClr val="262422"/>
                 </a:solidFill>
-                <a:latin typeface="Libre Caslon Display"/>
+                <a:latin typeface="Georgia"/>
               </a:rPr>
               <a:t>Who gains if I believe it?</a:t>
             </a:r>
@@ -18555,11 +18060,11 @@
               </a:spcAft>
             </a:pPr>
             <a:r>
-              <a:rPr sz="1300" b="1" i="0">
+              <a:rPr sz="1300" b="0" i="0">
                 <a:solidFill>
                   <a:srgbClr val="262422"/>
                 </a:solidFill>
-                <a:latin typeface="Libre Caslon Display"/>
+                <a:latin typeface="Georgia"/>
               </a:rPr>
               <a:t>Who paid for it?</a:t>
             </a:r>
@@ -18755,11 +18260,11 @@
               </a:spcAft>
             </a:pPr>
             <a:r>
-              <a:rPr sz="1300" b="1" i="0">
+              <a:rPr sz="1300" b="0" i="0">
                 <a:solidFill>
                   <a:srgbClr val="262422"/>
                 </a:solidFill>
-                <a:latin typeface="Libre Caslon Display"/>
+                <a:latin typeface="Georgia"/>
               </a:rPr>
               <a:t>What is the evidence?</a:t>
             </a:r>
@@ -18955,11 +18460,11 @@
               </a:spcAft>
             </a:pPr>
             <a:r>
-              <a:rPr sz="1300" b="1" i="0">
+              <a:rPr sz="1300" b="0" i="0">
                 <a:solidFill>
                   <a:srgbClr val="262422"/>
                 </a:solidFill>
-                <a:latin typeface="Libre Caslon Display"/>
+                <a:latin typeface="Georgia"/>
               </a:rPr>
               <a:t>Has it been tested, and by whom?</a:t>
             </a:r>
@@ -19002,7 +18507,7 @@
                 <a:solidFill>
                   <a:srgbClr val="34322F"/>
                 </a:solidFill>
-                <a:latin typeface="Karla"/>
+                <a:latin typeface="Calibri"/>
               </a:rPr>
               <a:t>Then fill in the top of your evidence sheet: where you stand, and what you would need to know.</a:t>
             </a:r>
@@ -19070,7 +18575,7 @@
                 <a:solidFill>
                   <a:srgbClr val="8C877D"/>
                 </a:solidFill>
-                <a:latin typeface="Karla"/>
+                <a:latin typeface="Calibri"/>
               </a:rPr>
               <a:t>The Pastoral Guide</a:t>
             </a:r>
@@ -19113,7 +18618,7 @@
                 <a:solidFill>
                   <a:srgbClr val="8C877D"/>
                 </a:solidFill>
-                <a:latin typeface="Karla"/>
+                <a:latin typeface="Calibri"/>
               </a:rPr>
               <a:t>7 / 19</a:t>
             </a:r>
@@ -19218,7 +18723,7 @@
                 <a:solidFill>
                   <a:srgbClr val="34322F"/>
                 </a:solidFill>
-                <a:latin typeface="Karla"/>
+                <a:latin typeface="Calibri"/>
               </a:rPr>
               <a:t>QUESTION THE HEADLINE  ·  LESSON 5 OF 5</a:t>
             </a:r>
@@ -19273,7 +18778,7 @@
                 <a:solidFill>
                   <a:srgbClr val="FFFDF7"/>
                 </a:solidFill>
-                <a:latin typeface="Karla"/>
+                <a:latin typeface="Calibri"/>
               </a:rPr>
               <a:t>ROUND 1 OF 4</a:t>
             </a:r>
@@ -19360,7 +18865,7 @@
                 <a:solidFill>
                   <a:srgbClr val="FFFDF7"/>
                 </a:solidFill>
-                <a:latin typeface="Karla"/>
+                <a:latin typeface="Calibri"/>
               </a:rPr>
               <a:t>EVIDENCE A</a:t>
             </a:r>
@@ -19487,11 +18992,11 @@
               </a:spcAft>
             </a:pPr>
             <a:r>
-              <a:rPr sz="2200" b="1" i="0">
+              <a:rPr sz="2200" b="0" i="0">
                 <a:solidFill>
                   <a:srgbClr val="262422"/>
                 </a:solidFill>
-                <a:latin typeface="Libre Caslon Display"/>
+                <a:latin typeface="Georgia"/>
               </a:rPr>
               <a:t>The company</a:t>
             </a:r>
@@ -19577,7 +19082,7 @@
                 <a:solidFill>
                   <a:srgbClr val="8C877D"/>
                 </a:solidFill>
-                <a:latin typeface="Karla"/>
+                <a:latin typeface="Calibri"/>
               </a:rPr>
               <a:t>Source: Wikipedia, Crisco; University of Guelph</a:t>
             </a:r>
@@ -19620,7 +19125,7 @@
                 <a:solidFill>
                   <a:srgbClr val="34322F"/>
                 </a:solidFill>
-                <a:latin typeface="Karla"/>
+                <a:latin typeface="Calibri"/>
               </a:rPr>
               <a:t>Read it as a group. Fill in the card A row on your evidence sheet, then move on the line.</a:t>
             </a:r>
@@ -19688,7 +19193,7 @@
                 <a:solidFill>
                   <a:srgbClr val="8C877D"/>
                 </a:solidFill>
-                <a:latin typeface="Karla"/>
+                <a:latin typeface="Calibri"/>
               </a:rPr>
               <a:t>The Pastoral Guide</a:t>
             </a:r>
@@ -19731,7 +19236,7 @@
                 <a:solidFill>
                   <a:srgbClr val="8C877D"/>
                 </a:solidFill>
-                <a:latin typeface="Karla"/>
+                <a:latin typeface="Calibri"/>
               </a:rPr>
               <a:t>8 / 19</a:t>
             </a:r>
@@ -19836,7 +19341,7 @@
                 <a:solidFill>
                   <a:srgbClr val="34322F"/>
                 </a:solidFill>
-                <a:latin typeface="Karla"/>
+                <a:latin typeface="Calibri"/>
               </a:rPr>
               <a:t>QUESTION THE HEADLINE  ·  LESSON 5 OF 5</a:t>
             </a:r>
@@ -19891,7 +19396,7 @@
                 <a:solidFill>
                   <a:srgbClr val="FFFDF7"/>
                 </a:solidFill>
-                <a:latin typeface="Karla"/>
+                <a:latin typeface="Calibri"/>
               </a:rPr>
               <a:t>ROUND 2 OF 4</a:t>
             </a:r>
@@ -19978,7 +19483,7 @@
                 <a:solidFill>
                   <a:srgbClr val="FFFDF7"/>
                 </a:solidFill>
-                <a:latin typeface="Karla"/>
+                <a:latin typeface="Calibri"/>
               </a:rPr>
               <a:t>EVIDENCE B</a:t>
             </a:r>
@@ -20105,11 +19610,11 @@
               </a:spcAft>
             </a:pPr>
             <a:r>
-              <a:rPr sz="2200" b="1" i="0">
+              <a:rPr sz="2200" b="0" i="0">
                 <a:solidFill>
                   <a:srgbClr val="262422"/>
                 </a:solidFill>
-                <a:latin typeface="Libre Caslon Display"/>
+                <a:latin typeface="Georgia"/>
               </a:rPr>
               <a:t>The adverts</a:t>
             </a:r>
@@ -20195,7 +19700,7 @@
                 <a:solidFill>
                   <a:srgbClr val="8C877D"/>
                 </a:solidFill>
-                <a:latin typeface="Karla"/>
+                <a:latin typeface="Calibri"/>
               </a:rPr>
               <a:t>Source: NPR, 2012; Wikipedia, Crisco; University of Guelph</a:t>
             </a:r>
@@ -20238,7 +19743,7 @@
                 <a:solidFill>
                   <a:srgbClr val="34322F"/>
                 </a:solidFill>
-                <a:latin typeface="Karla"/>
+                <a:latin typeface="Calibri"/>
               </a:rPr>
               <a:t>Read it as a group. Fill in the card B row on your evidence sheet, then move on the line.</a:t>
             </a:r>
@@ -20306,7 +19811,7 @@
                 <a:solidFill>
                   <a:srgbClr val="8C877D"/>
                 </a:solidFill>
-                <a:latin typeface="Karla"/>
+                <a:latin typeface="Calibri"/>
               </a:rPr>
               <a:t>The Pastoral Guide</a:t>
             </a:r>
@@ -20349,7 +19854,7 @@
                 <a:solidFill>
                   <a:srgbClr val="8C877D"/>
                 </a:solidFill>
-                <a:latin typeface="Karla"/>
+                <a:latin typeface="Calibri"/>
               </a:rPr>
               <a:t>9 / 19</a:t>
             </a:r>
